--- a/presentations/lightweight-doc-tc154-dis-proposal.pptx
+++ b/presentations/lightweight-doc-tc154-dis-proposal.pptx
@@ -13,6 +13,10 @@
     <p:sldId id="261" r:id="rId12"/>
     <p:sldId id="262" r:id="rId13"/>
     <p:sldId id="263" r:id="rId14"/>
+    <p:sldId id="264" r:id="rId15"/>
+    <p:sldId id="265" r:id="rId16"/>
+    <p:sldId id="266" r:id="rId17"/>
+    <p:sldId id="267" r:id="rId18"/>
   </p:sldIdLst>
   <p:sldSz cx="12191695" cy="6858000" type="screen4x3"/>
   <p:notesSz cx="6858000" cy="9144000"/>
@@ -3112,7 +3116,7 @@
         <p:spPr>
           <a:xfrm>
             <a:off x="0" y="0"/>
-            <a:ext cx="12191695" cy="164592"/>
+            <a:ext cx="12191695" cy="182880"/>
           </a:xfrm>
           <a:prstGeom prst="rect">
             <a:avLst/>
@@ -3154,7 +3158,7 @@
         </p:nvSpPr>
         <p:spPr>
           <a:xfrm>
-            <a:off x="822960" y="1371600"/>
+            <a:off x="822960" y="1234440"/>
             <a:ext cx="10515600" cy="457200"/>
           </a:xfrm>
           <a:prstGeom prst="rect">
@@ -3169,7 +3173,7 @@
           <a:lstStyle/>
           <a:p>
             <a:pPr>
-              <a:defRPr sz="1500" b="0">
+              <a:defRPr sz="1600" b="0">
                 <a:solidFill>
                   <a:srgbClr val="2F6F82"/>
                 </a:solidFill>
@@ -3190,8 +3194,8 @@
         </p:nvSpPr>
         <p:spPr>
           <a:xfrm>
-            <a:off x="822960" y="1920240"/>
-            <a:ext cx="10515600" cy="1828800"/>
+            <a:off x="822960" y="1783080"/>
+            <a:ext cx="10515600" cy="1920240"/>
           </a:xfrm>
           <a:prstGeom prst="rect">
             <a:avLst/>
@@ -3205,7 +3209,7 @@
           <a:lstStyle/>
           <a:p>
             <a:pPr>
-              <a:defRPr sz="4800" b="1">
+              <a:defRPr sz="5200" b="1">
                 <a:solidFill>
                   <a:srgbClr val="FFFAF2"/>
                 </a:solidFill>
@@ -3217,7 +3221,7 @@
           </a:p>
           <a:p>
             <a:pPr>
-              <a:defRPr sz="4800" b="1">
+              <a:defRPr sz="5200" b="1">
                 <a:solidFill>
                   <a:srgbClr val="FFFAF2"/>
                 </a:solidFill>
@@ -3237,8 +3241,8 @@
         </p:nvSpPr>
         <p:spPr>
           <a:xfrm>
-            <a:off x="822960" y="3931920"/>
-            <a:ext cx="10515600" cy="548640"/>
+            <a:off x="822960" y="3886200"/>
+            <a:ext cx="10515600" cy="640080"/>
           </a:xfrm>
           <a:prstGeom prst="rect">
             <a:avLst/>
@@ -3252,14 +3256,14 @@
           <a:lstStyle/>
           <a:p>
             <a:pPr>
-              <a:defRPr sz="2000" b="0">
+              <a:defRPr sz="2400" b="0">
                 <a:solidFill>
                   <a:srgbClr val="C5DDE4"/>
                 </a:solidFill>
               </a:defRPr>
             </a:pPr>
             <a:r>
-              <a:t>One model for every markup: harmonized, specializable, extensible</a:t>
+              <a:t>The missing interoperability layer for structured text</a:t>
             </a:r>
           </a:p>
         </p:txBody>
@@ -3272,8 +3276,8 @@
         </p:nvSpPr>
         <p:spPr>
           <a:xfrm>
-            <a:off x="822960" y="5120640"/>
-            <a:ext cx="10515600" cy="914400"/>
+            <a:off x="822960" y="5029200"/>
+            <a:ext cx="10515600" cy="1097280"/>
           </a:xfrm>
           <a:prstGeom prst="rect">
             <a:avLst/>
@@ -3287,26 +3291,1084 @@
           <a:lstStyle/>
           <a:p>
             <a:pPr>
+              <a:spcAft>
+                <a:spcPts val="800"/>
+              </a:spcAft>
+              <a:defRPr sz="1500" b="0">
+                <a:solidFill>
+                  <a:srgbClr val="8A9AAB"/>
+                </a:solidFill>
+              </a:defRPr>
+            </a:pPr>
+            <a:r>
+              <a:t>Proposed by CalConnect (TC VCARD)</a:t>
+            </a:r>
+          </a:p>
+          <a:p>
+            <a:pPr>
+              <a:spcAft>
+                <a:spcPts val="800"/>
+              </a:spcAft>
+              <a:defRPr sz="1500" b="0">
+                <a:solidFill>
+                  <a:srgbClr val="8A9AAB"/>
+                </a:solidFill>
+              </a:defRPr>
+            </a:pPr>
+            <a:r>
+              <a:t>Base text CC/ISO 36010 · proof: 6+ years in production · every claim machine-checked</a:t>
+            </a:r>
+          </a:p>
+        </p:txBody>
+      </p:sp>
+    </p:spTree>
+  </p:cSld>
+  <p:clrMapOvr>
+    <a:masterClrMapping/>
+  </p:clrMapOvr>
+</p:sld>
+</file>
+
+<file path=ppt/slides/slide10.xml><?xml version="1.0" encoding="utf-8"?>
+<p:sld xmlns:a="http://schemas.openxmlformats.org/drawingml/2006/main" xmlns:p="http://schemas.openxmlformats.org/presentationml/2006/main" xmlns:r="http://schemas.openxmlformats.org/officeDocument/2006/relationships">
+  <p:cSld>
+    <p:bg>
+      <p:bgPr>
+        <a:solidFill>
+          <a:srgbClr val="FFFAF2"/>
+        </a:solidFill>
+        <a:effectLst/>
+      </p:bgPr>
+    </p:bg>
+    <p:spTree>
+      <p:nvGrpSpPr>
+        <p:cNvPr id="1" name=""/>
+        <p:cNvGrpSpPr/>
+        <p:nvPr/>
+      </p:nvGrpSpPr>
+      <p:grpSpPr/>
+      <p:sp>
+        <p:nvSpPr>
+          <p:cNvPr id="2" name="Rectangle 1"/>
+          <p:cNvSpPr/>
+          <p:nvPr/>
+        </p:nvSpPr>
+        <p:spPr>
+          <a:xfrm>
+            <a:off x="0" y="0"/>
+            <a:ext cx="12191695" cy="109728"/>
+          </a:xfrm>
+          <a:prstGeom prst="rect">
+            <a:avLst/>
+          </a:prstGeom>
+          <a:solidFill>
+            <a:srgbClr val="B85A2A"/>
+          </a:solidFill>
+          <a:ln>
+            <a:noFill/>
+          </a:ln>
+        </p:spPr>
+        <p:style>
+          <a:lnRef idx="1">
+            <a:schemeClr val="accent1"/>
+          </a:lnRef>
+          <a:fillRef idx="3">
+            <a:schemeClr val="accent1"/>
+          </a:fillRef>
+          <a:effectRef idx="2">
+            <a:schemeClr val="accent1"/>
+          </a:effectRef>
+          <a:fontRef idx="minor">
+            <a:schemeClr val="lt1"/>
+          </a:fontRef>
+        </p:style>
+        <p:txBody>
+          <a:bodyPr rtlCol="0" anchor="ctr"/>
+          <a:lstStyle/>
+          <a:p>
+            <a:pPr algn="ctr"/>
+          </a:p>
+        </p:txBody>
+      </p:sp>
+      <p:sp>
+        <p:nvSpPr>
+          <p:cNvPr id="3" name="TextBox 2"/>
+          <p:cNvSpPr txBox="1"/>
+          <p:nvPr/>
+        </p:nvSpPr>
+        <p:spPr>
+          <a:xfrm>
+            <a:off x="822960" y="457200"/>
+            <a:ext cx="10515600" cy="365760"/>
+          </a:xfrm>
+          <a:prstGeom prst="rect">
+            <a:avLst/>
+          </a:prstGeom>
+          <a:noFill/>
+        </p:spPr>
+        <p:txBody>
+          <a:bodyPr wrap="square">
+            <a:spAutoFit/>
+          </a:bodyPr>
+          <a:lstStyle/>
+          <a:p>
+            <a:pPr>
               <a:defRPr sz="1400" b="0">
                 <a:solidFill>
+                  <a:srgbClr val="2F6F82"/>
+                </a:solidFill>
+                <a:latin typeface="Courier New"/>
+              </a:defRPr>
+            </a:pPr>
+            <a:r>
+              <a:t>EXECUTABLE CONFORMANCE — ANNEX D</a:t>
+            </a:r>
+          </a:p>
+        </p:txBody>
+      </p:sp>
+      <p:sp>
+        <p:nvSpPr>
+          <p:cNvPr id="4" name="TextBox 3"/>
+          <p:cNvSpPr txBox="1"/>
+          <p:nvPr/>
+        </p:nvSpPr>
+        <p:spPr>
+          <a:xfrm>
+            <a:off x="822960" y="841248"/>
+            <a:ext cx="10515600" cy="960120"/>
+          </a:xfrm>
+          <a:prstGeom prst="rect">
+            <a:avLst/>
+          </a:prstGeom>
+          <a:noFill/>
+        </p:spPr>
+        <p:txBody>
+          <a:bodyPr wrap="square">
+            <a:spAutoFit/>
+          </a:bodyPr>
+          <a:lstStyle/>
+          <a:p>
+            <a:pPr>
+              <a:defRPr sz="3400" b="1">
+                <a:solidFill>
+                  <a:srgbClr val="0A1628"/>
+                </a:solidFill>
+              </a:defRPr>
+            </a:pPr>
+            <a:r>
+              <a:t>Not “trust us” — a standard with a passing test suite</a:t>
+            </a:r>
+          </a:p>
+        </p:txBody>
+      </p:sp>
+      <p:pic>
+        <p:nvPicPr>
+          <p:cNvPr id="5" name="Picture 4" descr="d6-conformance.png"/>
+          <p:cNvPicPr>
+            <a:picLocks noChangeAspect="1"/>
+          </p:cNvPicPr>
+          <p:nvPr/>
+        </p:nvPicPr>
+        <p:blipFill>
+          <a:blip r:embed="rId2"/>
+          <a:stretch>
+            <a:fillRect/>
+          </a:stretch>
+        </p:blipFill>
+        <p:spPr>
+          <a:xfrm>
+            <a:off x="1638147" y="1554480"/>
+            <a:ext cx="8915400" cy="4160520"/>
+          </a:xfrm>
+          <a:prstGeom prst="rect">
+            <a:avLst/>
+          </a:prstGeom>
+        </p:spPr>
+      </p:pic>
+      <p:sp>
+        <p:nvSpPr>
+          <p:cNvPr id="6" name="TextBox 5"/>
+          <p:cNvSpPr txBox="1"/>
+          <p:nvPr/>
+        </p:nvSpPr>
+        <p:spPr>
+          <a:xfrm>
+            <a:off x="822960" y="6446520"/>
+            <a:ext cx="10515600" cy="320040"/>
+          </a:xfrm>
+          <a:prstGeom prst="rect">
+            <a:avLst/>
+          </a:prstGeom>
+          <a:noFill/>
+        </p:spPr>
+        <p:txBody>
+          <a:bodyPr wrap="square">
+            <a:spAutoFit/>
+          </a:bodyPr>
+          <a:lstStyle/>
+          <a:p>
+            <a:pPr>
+              <a:defRPr sz="1000" b="0">
+                <a:solidFill>
                   <a:srgbClr val="8A9AAB"/>
                 </a:solidFill>
               </a:defRPr>
             </a:pPr>
             <a:r>
-              <a:t>Proposed by CalConnect (TC VCARD) to ISO/TC 154</a:t>
-            </a:r>
-          </a:p>
+              <a:t>CalConnect → ISO/TC 154 · CC/ISO 36010 · 10</a:t>
+            </a:r>
+          </a:p>
+        </p:txBody>
+      </p:sp>
+    </p:spTree>
+  </p:cSld>
+  <p:clrMapOvr>
+    <a:masterClrMapping/>
+  </p:clrMapOvr>
+</p:sld>
+</file>
+
+<file path=ppt/slides/slide11.xml><?xml version="1.0" encoding="utf-8"?>
+<p:sld xmlns:a="http://schemas.openxmlformats.org/drawingml/2006/main" xmlns:p="http://schemas.openxmlformats.org/presentationml/2006/main" xmlns:r="http://schemas.openxmlformats.org/officeDocument/2006/relationships">
+  <p:cSld>
+    <p:bg>
+      <p:bgPr>
+        <a:solidFill>
+          <a:srgbClr val="FFFAF2"/>
+        </a:solidFill>
+        <a:effectLst/>
+      </p:bgPr>
+    </p:bg>
+    <p:spTree>
+      <p:nvGrpSpPr>
+        <p:cNvPr id="1" name=""/>
+        <p:cNvGrpSpPr/>
+        <p:nvPr/>
+      </p:nvGrpSpPr>
+      <p:grpSpPr/>
+      <p:sp>
+        <p:nvSpPr>
+          <p:cNvPr id="2" name="Rectangle 1"/>
+          <p:cNvSpPr/>
+          <p:nvPr/>
+        </p:nvSpPr>
+        <p:spPr>
+          <a:xfrm>
+            <a:off x="0" y="0"/>
+            <a:ext cx="12191695" cy="109728"/>
+          </a:xfrm>
+          <a:prstGeom prst="rect">
+            <a:avLst/>
+          </a:prstGeom>
+          <a:solidFill>
+            <a:srgbClr val="B85A2A"/>
+          </a:solidFill>
+          <a:ln>
+            <a:noFill/>
+          </a:ln>
+        </p:spPr>
+        <p:style>
+          <a:lnRef idx="1">
+            <a:schemeClr val="accent1"/>
+          </a:lnRef>
+          <a:fillRef idx="3">
+            <a:schemeClr val="accent1"/>
+          </a:fillRef>
+          <a:effectRef idx="2">
+            <a:schemeClr val="accent1"/>
+          </a:effectRef>
+          <a:fontRef idx="minor">
+            <a:schemeClr val="lt1"/>
+          </a:fontRef>
+        </p:style>
+        <p:txBody>
+          <a:bodyPr rtlCol="0" anchor="ctr"/>
+          <a:lstStyle/>
+          <a:p>
+            <a:pPr algn="ctr"/>
+          </a:p>
+        </p:txBody>
+      </p:sp>
+      <p:sp>
+        <p:nvSpPr>
+          <p:cNvPr id="3" name="TextBox 2"/>
+          <p:cNvSpPr txBox="1"/>
+          <p:nvPr/>
+        </p:nvSpPr>
+        <p:spPr>
+          <a:xfrm>
+            <a:off x="822960" y="457200"/>
+            <a:ext cx="10515600" cy="365760"/>
+          </a:xfrm>
+          <a:prstGeom prst="rect">
+            <a:avLst/>
+          </a:prstGeom>
+          <a:noFill/>
+        </p:spPr>
+        <p:txBody>
+          <a:bodyPr wrap="square">
+            <a:spAutoFit/>
+          </a:bodyPr>
+          <a:lstStyle/>
           <a:p>
             <a:pPr>
               <a:defRPr sz="1400" b="0">
                 <a:solidFill>
+                  <a:srgbClr val="2F6F82"/>
+                </a:solidFill>
+                <a:latin typeface="Courier New"/>
+              </a:defRPr>
+            </a:pPr>
+            <a:r>
+              <a:t>EVIDENCE</a:t>
+            </a:r>
+          </a:p>
+        </p:txBody>
+      </p:sp>
+      <p:sp>
+        <p:nvSpPr>
+          <p:cNvPr id="4" name="TextBox 3"/>
+          <p:cNvSpPr txBox="1"/>
+          <p:nvPr/>
+        </p:nvSpPr>
+        <p:spPr>
+          <a:xfrm>
+            <a:off x="822960" y="841248"/>
+            <a:ext cx="10515600" cy="960120"/>
+          </a:xfrm>
+          <a:prstGeom prst="rect">
+            <a:avLst/>
+          </a:prstGeom>
+          <a:noFill/>
+        </p:spPr>
+        <p:txBody>
+          <a:bodyPr wrap="square">
+            <a:spAutoFit/>
+          </a:bodyPr>
+          <a:lstStyle/>
+          <a:p>
+            <a:pPr>
+              <a:defRPr sz="3400" b="1">
+                <a:solidFill>
+                  <a:srgbClr val="0A1628"/>
+                </a:solidFill>
+              </a:defRPr>
+            </a:pPr>
+            <a:r>
+              <a:t>Extracted from production, not invented for a committee</a:t>
+            </a:r>
+          </a:p>
+        </p:txBody>
+      </p:sp>
+      <p:sp>
+        <p:nvSpPr>
+          <p:cNvPr id="5" name="TextBox 4"/>
+          <p:cNvSpPr txBox="1"/>
+          <p:nvPr/>
+        </p:nvSpPr>
+        <p:spPr>
+          <a:xfrm>
+            <a:off x="822960" y="1783080"/>
+            <a:ext cx="3108960" cy="548640"/>
+          </a:xfrm>
+          <a:prstGeom prst="rect">
+            <a:avLst/>
+          </a:prstGeom>
+          <a:noFill/>
+        </p:spPr>
+        <p:txBody>
+          <a:bodyPr wrap="square">
+            <a:spAutoFit/>
+          </a:bodyPr>
+          <a:lstStyle/>
+          <a:p>
+            <a:pPr>
+              <a:defRPr sz="1550" b="1">
+                <a:solidFill>
+                  <a:srgbClr val="2F6F82"/>
+                </a:solidFill>
+              </a:defRPr>
+            </a:pPr>
+            <a:r>
+              <a:t>30+ document flavours</a:t>
+            </a:r>
+          </a:p>
+        </p:txBody>
+      </p:sp>
+      <p:sp>
+        <p:nvSpPr>
+          <p:cNvPr id="6" name="TextBox 5"/>
+          <p:cNvSpPr txBox="1"/>
+          <p:nvPr/>
+        </p:nvSpPr>
+        <p:spPr>
+          <a:xfrm>
+            <a:off x="4206240" y="1783080"/>
+            <a:ext cx="7223760" cy="914400"/>
+          </a:xfrm>
+          <a:prstGeom prst="rect">
+            <a:avLst/>
+          </a:prstGeom>
+          <a:noFill/>
+        </p:spPr>
+        <p:txBody>
+          <a:bodyPr wrap="square">
+            <a:spAutoFit/>
+          </a:bodyPr>
+          <a:lstStyle/>
+          <a:p>
+            <a:pPr>
+              <a:defRPr sz="1250" b="0">
+                <a:solidFill>
+                  <a:srgbClr val="243647"/>
+                </a:solidFill>
+              </a:defRPr>
+            </a:pPr>
+            <a:r>
+              <a:t>Metanorma authors and publishes real standards on this model today (relaton-models, standoc-models consumers, all pinned in lockstep)</a:t>
+            </a:r>
+          </a:p>
+        </p:txBody>
+      </p:sp>
+      <p:sp>
+        <p:nvSpPr>
+          <p:cNvPr id="7" name="TextBox 6"/>
+          <p:cNvSpPr txBox="1"/>
+          <p:nvPr/>
+        </p:nvSpPr>
+        <p:spPr>
+          <a:xfrm>
+            <a:off x="822960" y="2679191"/>
+            <a:ext cx="3108960" cy="548640"/>
+          </a:xfrm>
+          <a:prstGeom prst="rect">
+            <a:avLst/>
+          </a:prstGeom>
+          <a:noFill/>
+        </p:spPr>
+        <p:txBody>
+          <a:bodyPr wrap="square">
+            <a:spAutoFit/>
+          </a:bodyPr>
+          <a:lstStyle/>
+          <a:p>
+            <a:pPr>
+              <a:defRPr sz="1550" b="1">
+                <a:solidFill>
+                  <a:srgbClr val="2F6F82"/>
+                </a:solidFill>
+              </a:defRPr>
+            </a:pPr>
+            <a:r>
+              <a:t>ISO-grade outputs</a:t>
+            </a:r>
+          </a:p>
+        </p:txBody>
+      </p:sp>
+      <p:sp>
+        <p:nvSpPr>
+          <p:cNvPr id="8" name="TextBox 7"/>
+          <p:cNvSpPr txBox="1"/>
+          <p:nvPr/>
+        </p:nvSpPr>
+        <p:spPr>
+          <a:xfrm>
+            <a:off x="4206240" y="2679191"/>
+            <a:ext cx="7223760" cy="914400"/>
+          </a:xfrm>
+          <a:prstGeom prst="rect">
+            <a:avLst/>
+          </a:prstGeom>
+          <a:noFill/>
+        </p:spPr>
+        <p:txBody>
+          <a:bodyPr wrap="square">
+            <a:spAutoFit/>
+          </a:bodyPr>
+          <a:lstStyle/>
+          <a:p>
+            <a:pPr>
+              <a:defRPr sz="1250" b="0">
+                <a:solidFill>
+                  <a:srgbClr val="243647"/>
+                </a:solidFill>
+              </a:defRPr>
+            </a:pPr>
+            <a:r>
+              <a:t>The model renders to ISO/IEC-standard layouts — HTML, PDF, Word — proving the model→presentation direction daily</a:t>
+            </a:r>
+          </a:p>
+        </p:txBody>
+      </p:sp>
+      <p:sp>
+        <p:nvSpPr>
+          <p:cNvPr id="9" name="TextBox 8"/>
+          <p:cNvSpPr txBox="1"/>
+          <p:nvPr/>
+        </p:nvSpPr>
+        <p:spPr>
+          <a:xfrm>
+            <a:off x="822960" y="3575303"/>
+            <a:ext cx="3108960" cy="548640"/>
+          </a:xfrm>
+          <a:prstGeom prst="rect">
+            <a:avLst/>
+          </a:prstGeom>
+          <a:noFill/>
+        </p:spPr>
+        <p:txBody>
+          <a:bodyPr wrap="square">
+            <a:spAutoFit/>
+          </a:bodyPr>
+          <a:lstStyle/>
+          <a:p>
+            <a:pPr>
+              <a:defRPr sz="1550" b="1">
+                <a:solidFill>
+                  <a:srgbClr val="2F6F82"/>
+                </a:solidFill>
+              </a:defRPr>
+            </a:pPr>
+            <a:r>
+              <a:t>Registry-native</a:t>
+            </a:r>
+          </a:p>
+        </p:txBody>
+      </p:sp>
+      <p:sp>
+        <p:nvSpPr>
+          <p:cNvPr id="10" name="TextBox 9"/>
+          <p:cNvSpPr txBox="1"/>
+          <p:nvPr/>
+        </p:nvSpPr>
+        <p:spPr>
+          <a:xfrm>
+            <a:off x="4206240" y="3575303"/>
+            <a:ext cx="7223760" cy="914400"/>
+          </a:xfrm>
+          <a:prstGeom prst="rect">
+            <a:avLst/>
+          </a:prstGeom>
+          <a:noFill/>
+        </p:spPr>
+        <p:txBody>
+          <a:bodyPr wrap="square">
+            <a:spAutoFit/>
+          </a:bodyPr>
+          <a:lstStyle/>
+          <a:p>
+            <a:pPr>
+              <a:defRPr sz="1250" b="0">
+                <a:solidFill>
+                  <a:srgbClr val="243647"/>
+                </a:solidFill>
+              </a:defRPr>
+            </a:pPr>
+            <a:r>
+              <a:t>Localized strings are ISO 24229 spelling systems; romanization schemes carry ISO 24229 system codes as register schemes</a:t>
+            </a:r>
+          </a:p>
+        </p:txBody>
+      </p:sp>
+      <p:sp>
+        <p:nvSpPr>
+          <p:cNvPr id="11" name="TextBox 10"/>
+          <p:cNvSpPr txBox="1"/>
+          <p:nvPr/>
+        </p:nvSpPr>
+        <p:spPr>
+          <a:xfrm>
+            <a:off x="822960" y="4471416"/>
+            <a:ext cx="3108960" cy="548640"/>
+          </a:xfrm>
+          <a:prstGeom prst="rect">
+            <a:avLst/>
+          </a:prstGeom>
+          <a:noFill/>
+        </p:spPr>
+        <p:txBody>
+          <a:bodyPr wrap="square">
+            <a:spAutoFit/>
+          </a:bodyPr>
+          <a:lstStyle/>
+          <a:p>
+            <a:pPr>
+              <a:defRPr sz="1550" b="1">
+                <a:solidFill>
+                  <a:srgbClr val="2F6F82"/>
+                </a:solidFill>
+              </a:defRPr>
+            </a:pPr>
+            <a:r>
+              <a:t>Open artifacts</a:t>
+            </a:r>
+          </a:p>
+        </p:txBody>
+      </p:sp>
+      <p:sp>
+        <p:nvSpPr>
+          <p:cNvPr id="12" name="TextBox 11"/>
+          <p:cNvSpPr txBox="1"/>
+          <p:nvPr/>
+        </p:nvSpPr>
+        <p:spPr>
+          <a:xfrm>
+            <a:off x="4206240" y="4471416"/>
+            <a:ext cx="7223760" cy="914400"/>
+          </a:xfrm>
+          <a:prstGeom prst="rect">
+            <a:avLst/>
+          </a:prstGeom>
+          <a:noFill/>
+        </p:spPr>
+        <p:txBody>
+          <a:bodyPr wrap="square">
+            <a:spAutoFit/>
+          </a:bodyPr>
+          <a:lstStyle/>
+          <a:p>
+            <a:pPr>
+              <a:defRPr sz="1250" b="0">
+                <a:solidFill>
+                  <a:srgbClr val="243647"/>
+                </a:solidFill>
+              </a:defRPr>
+            </a:pPr>
+            <a:r>
+              <a:t>Model sources, grammars, twin instances, gates, atlas site — public at metanorma/basicdoc-models; every merge runs the suite</a:t>
+            </a:r>
+          </a:p>
+        </p:txBody>
+      </p:sp>
+      <p:sp>
+        <p:nvSpPr>
+          <p:cNvPr id="13" name="TextBox 12"/>
+          <p:cNvSpPr txBox="1"/>
+          <p:nvPr/>
+        </p:nvSpPr>
+        <p:spPr>
+          <a:xfrm>
+            <a:off x="822960" y="5367527"/>
+            <a:ext cx="3108960" cy="548640"/>
+          </a:xfrm>
+          <a:prstGeom prst="rect">
+            <a:avLst/>
+          </a:prstGeom>
+          <a:noFill/>
+        </p:spPr>
+        <p:txBody>
+          <a:bodyPr wrap="square">
+            <a:spAutoFit/>
+          </a:bodyPr>
+          <a:lstStyle/>
+          <a:p>
+            <a:pPr>
+              <a:defRPr sz="1550" b="1">
+                <a:solidFill>
+                  <a:srgbClr val="2F6F82"/>
+                </a:solidFill>
+              </a:defRPr>
+            </a:pPr>
+            <a:r>
+              <a:t>Live model atlas</a:t>
+            </a:r>
+          </a:p>
+        </p:txBody>
+      </p:sp>
+      <p:sp>
+        <p:nvSpPr>
+          <p:cNvPr id="14" name="TextBox 13"/>
+          <p:cNvSpPr txBox="1"/>
+          <p:nvPr/>
+        </p:nvSpPr>
+        <p:spPr>
+          <a:xfrm>
+            <a:off x="4206240" y="5367527"/>
+            <a:ext cx="7223760" cy="914400"/>
+          </a:xfrm>
+          <a:prstGeom prst="rect">
+            <a:avLst/>
+          </a:prstGeom>
+          <a:noFill/>
+        </p:spPr>
+        <p:txBody>
+          <a:bodyPr wrap="square">
+            <a:spAutoFit/>
+          </a:bodyPr>
+          <a:lstStyle/>
+          <a:p>
+            <a:pPr>
+              <a:defRPr sz="1250" b="0">
+                <a:solidFill>
+                  <a:srgbClr val="243647"/>
+                </a:solidFill>
+              </a:defRPr>
+            </a:pPr>
+            <a:r>
+              <a:t>metanorma.github.io/basicdoc-models — every plate with full definitions, hyperlinked types, deep links</a:t>
+            </a:r>
+          </a:p>
+        </p:txBody>
+      </p:sp>
+      <p:sp>
+        <p:nvSpPr>
+          <p:cNvPr id="15" name="TextBox 14"/>
+          <p:cNvSpPr txBox="1"/>
+          <p:nvPr/>
+        </p:nvSpPr>
+        <p:spPr>
+          <a:xfrm>
+            <a:off x="822960" y="6446520"/>
+            <a:ext cx="10515600" cy="320040"/>
+          </a:xfrm>
+          <a:prstGeom prst="rect">
+            <a:avLst/>
+          </a:prstGeom>
+          <a:noFill/>
+        </p:spPr>
+        <p:txBody>
+          <a:bodyPr wrap="square">
+            <a:spAutoFit/>
+          </a:bodyPr>
+          <a:lstStyle/>
+          <a:p>
+            <a:pPr>
+              <a:defRPr sz="1000" b="0">
+                <a:solidFill>
                   <a:srgbClr val="8A9AAB"/>
                 </a:solidFill>
               </a:defRPr>
             </a:pPr>
             <a:r>
-              <a:t>Base text: CC/ISO 36010 · Model source: basicdoc-models · Atlas: metanorma.github.io/basicdoc-models</a:t>
+              <a:t>CalConnect → ISO/TC 154 · CC/ISO 36010 · 11</a:t>
+            </a:r>
+          </a:p>
+        </p:txBody>
+      </p:sp>
+    </p:spTree>
+  </p:cSld>
+  <p:clrMapOvr>
+    <a:masterClrMapping/>
+  </p:clrMapOvr>
+</p:sld>
+</file>
+
+<file path=ppt/slides/slide12.xml><?xml version="1.0" encoding="utf-8"?>
+<p:sld xmlns:a="http://schemas.openxmlformats.org/drawingml/2006/main" xmlns:p="http://schemas.openxmlformats.org/presentationml/2006/main" xmlns:r="http://schemas.openxmlformats.org/officeDocument/2006/relationships">
+  <p:cSld>
+    <p:bg>
+      <p:bgPr>
+        <a:solidFill>
+          <a:srgbClr val="0A1628"/>
+        </a:solidFill>
+        <a:effectLst/>
+      </p:bgPr>
+    </p:bg>
+    <p:spTree>
+      <p:nvGrpSpPr>
+        <p:cNvPr id="1" name=""/>
+        <p:cNvGrpSpPr/>
+        <p:nvPr/>
+      </p:nvGrpSpPr>
+      <p:grpSpPr/>
+      <p:sp>
+        <p:nvSpPr>
+          <p:cNvPr id="2" name="Rectangle 1"/>
+          <p:cNvSpPr/>
+          <p:nvPr/>
+        </p:nvSpPr>
+        <p:spPr>
+          <a:xfrm>
+            <a:off x="0" y="0"/>
+            <a:ext cx="12191695" cy="182880"/>
+          </a:xfrm>
+          <a:prstGeom prst="rect">
+            <a:avLst/>
+          </a:prstGeom>
+          <a:solidFill>
+            <a:srgbClr val="B85A2A"/>
+          </a:solidFill>
+          <a:ln>
+            <a:noFill/>
+          </a:ln>
+        </p:spPr>
+        <p:style>
+          <a:lnRef idx="1">
+            <a:schemeClr val="accent1"/>
+          </a:lnRef>
+          <a:fillRef idx="3">
+            <a:schemeClr val="accent1"/>
+          </a:fillRef>
+          <a:effectRef idx="2">
+            <a:schemeClr val="accent1"/>
+          </a:effectRef>
+          <a:fontRef idx="minor">
+            <a:schemeClr val="lt1"/>
+          </a:fontRef>
+        </p:style>
+        <p:txBody>
+          <a:bodyPr rtlCol="0" anchor="ctr"/>
+          <a:lstStyle/>
+          <a:p>
+            <a:pPr algn="ctr"/>
+          </a:p>
+        </p:txBody>
+      </p:sp>
+      <p:sp>
+        <p:nvSpPr>
+          <p:cNvPr id="3" name="TextBox 2"/>
+          <p:cNvSpPr txBox="1"/>
+          <p:nvPr/>
+        </p:nvSpPr>
+        <p:spPr>
+          <a:xfrm>
+            <a:off x="822960" y="1051560"/>
+            <a:ext cx="10515600" cy="457200"/>
+          </a:xfrm>
+          <a:prstGeom prst="rect">
+            <a:avLst/>
+          </a:prstGeom>
+          <a:noFill/>
+        </p:spPr>
+        <p:txBody>
+          <a:bodyPr wrap="square">
+            <a:spAutoFit/>
+          </a:bodyPr>
+          <a:lstStyle/>
+          <a:p>
+            <a:pPr>
+              <a:defRPr sz="1600" b="0">
+                <a:solidFill>
+                  <a:srgbClr val="2F6F82"/>
+                </a:solidFill>
+                <a:latin typeface="Courier New"/>
+              </a:defRPr>
+            </a:pPr>
+            <a:r>
+              <a:t>THE ASK</a:t>
+            </a:r>
+          </a:p>
+        </p:txBody>
+      </p:sp>
+      <p:sp>
+        <p:nvSpPr>
+          <p:cNvPr id="4" name="TextBox 3"/>
+          <p:cNvSpPr txBox="1"/>
+          <p:nvPr/>
+        </p:nvSpPr>
+        <p:spPr>
+          <a:xfrm>
+            <a:off x="822960" y="1554480"/>
+            <a:ext cx="10515600" cy="1371600"/>
+          </a:xfrm>
+          <a:prstGeom prst="rect">
+            <a:avLst/>
+          </a:prstGeom>
+          <a:noFill/>
+        </p:spPr>
+        <p:txBody>
+          <a:bodyPr wrap="square">
+            <a:spAutoFit/>
+          </a:bodyPr>
+          <a:lstStyle/>
+          <a:p>
+            <a:pPr>
+              <a:defRPr sz="3800" b="1">
+                <a:solidFill>
+                  <a:srgbClr val="FFFAF2"/>
+                </a:solidFill>
+              </a:defRPr>
+            </a:pPr>
+            <a:r>
+              <a:t>Adopt CC/ISO 36010 as the base text</a:t>
+            </a:r>
+          </a:p>
+          <a:p>
+            <a:pPr>
+              <a:defRPr sz="3800" b="1">
+                <a:solidFill>
+                  <a:srgbClr val="FFFAF2"/>
+                </a:solidFill>
+              </a:defRPr>
+            </a:pPr>
+            <a:r>
+              <a:t>for a Draft International Standard</a:t>
+            </a:r>
+          </a:p>
+        </p:txBody>
+      </p:sp>
+      <p:sp>
+        <p:nvSpPr>
+          <p:cNvPr id="5" name="TextBox 4"/>
+          <p:cNvSpPr txBox="1"/>
+          <p:nvPr/>
+        </p:nvSpPr>
+        <p:spPr>
+          <a:xfrm>
+            <a:off x="1005840" y="3291840"/>
+            <a:ext cx="10058400" cy="566928"/>
+          </a:xfrm>
+          <a:prstGeom prst="rect">
+            <a:avLst/>
+          </a:prstGeom>
+          <a:noFill/>
+        </p:spPr>
+        <p:txBody>
+          <a:bodyPr wrap="square">
+            <a:spAutoFit/>
+          </a:bodyPr>
+          <a:lstStyle/>
+          <a:p>
+            <a:pPr>
+              <a:defRPr sz="1600" b="0">
+                <a:solidFill>
+                  <a:srgbClr val="C5DDE4"/>
+                </a:solidFill>
+              </a:defRPr>
+            </a:pPr>
+            <a:r>
+              <a:t>→  Recognize the lightweight document metamodel as the interchange layer for structured text</a:t>
+            </a:r>
+          </a:p>
+        </p:txBody>
+      </p:sp>
+      <p:sp>
+        <p:nvSpPr>
+          <p:cNvPr id="6" name="TextBox 5"/>
+          <p:cNvSpPr txBox="1"/>
+          <p:nvPr/>
+        </p:nvSpPr>
+        <p:spPr>
+          <a:xfrm>
+            <a:off x="1005840" y="3968496"/>
+            <a:ext cx="10058400" cy="566928"/>
+          </a:xfrm>
+          <a:prstGeom prst="rect">
+            <a:avLst/>
+          </a:prstGeom>
+          <a:noFill/>
+        </p:spPr>
+        <p:txBody>
+          <a:bodyPr wrap="square">
+            <a:spAutoFit/>
+          </a:bodyPr>
+          <a:lstStyle/>
+          <a:p>
+            <a:pPr>
+              <a:defRPr sz="1600" b="0">
+                <a:solidFill>
+                  <a:srgbClr val="C5DDE4"/>
+                </a:solidFill>
+              </a:defRPr>
+            </a:pPr>
+            <a:r>
+              <a:t>→  Progress it at TC 154: NP → WD → CD → DIS — the base text is complete and tested today</a:t>
+            </a:r>
+          </a:p>
+        </p:txBody>
+      </p:sp>
+      <p:sp>
+        <p:nvSpPr>
+          <p:cNvPr id="7" name="TextBox 6"/>
+          <p:cNvSpPr txBox="1"/>
+          <p:nvPr/>
+        </p:nvSpPr>
+        <p:spPr>
+          <a:xfrm>
+            <a:off x="1005840" y="4645152"/>
+            <a:ext cx="10058400" cy="566928"/>
+          </a:xfrm>
+          <a:prstGeom prst="rect">
+            <a:avLst/>
+          </a:prstGeom>
+          <a:noFill/>
+        </p:spPr>
+        <p:txBody>
+          <a:bodyPr wrap="square">
+            <a:spAutoFit/>
+          </a:bodyPr>
+          <a:lstStyle/>
+          <a:p>
+            <a:pPr>
+              <a:defRPr sz="1600" b="0">
+                <a:solidFill>
+                  <a:srgbClr val="C5DDE4"/>
+                </a:solidFill>
+              </a:defRPr>
+            </a:pPr>
+            <a:r>
+              <a:t>→  Designate the public repository and its executable conformance suite as the maintenance vehicle</a:t>
+            </a:r>
+          </a:p>
+        </p:txBody>
+      </p:sp>
+      <p:sp>
+        <p:nvSpPr>
+          <p:cNvPr id="8" name="TextBox 7"/>
+          <p:cNvSpPr txBox="1"/>
+          <p:nvPr/>
+        </p:nvSpPr>
+        <p:spPr>
+          <a:xfrm>
+            <a:off x="1005840" y="5321808"/>
+            <a:ext cx="10058400" cy="566928"/>
+          </a:xfrm>
+          <a:prstGeom prst="rect">
+            <a:avLst/>
+          </a:prstGeom>
+          <a:noFill/>
+        </p:spPr>
+        <p:txBody>
+          <a:bodyPr wrap="square">
+            <a:spAutoFit/>
+          </a:bodyPr>
+          <a:lstStyle/>
+          <a:p>
+            <a:pPr>
+              <a:defRPr sz="1600" b="0">
+                <a:solidFill>
+                  <a:srgbClr val="C5DDE4"/>
+                </a:solidFill>
+              </a:defRPr>
+            </a:pPr>
+            <a:r>
+              <a:t>→  CalConnect (TC VCARD) continues as proposer and editor, liaising with TC 46 — we consume ISO 690 and ISO 5127, we do not duplicate them</a:t>
+            </a:r>
+          </a:p>
+        </p:txBody>
+      </p:sp>
+      <p:sp>
+        <p:nvSpPr>
+          <p:cNvPr id="9" name="TextBox 8"/>
+          <p:cNvSpPr txBox="1"/>
+          <p:nvPr/>
+        </p:nvSpPr>
+        <p:spPr>
+          <a:xfrm>
+            <a:off x="822960" y="6172200"/>
+            <a:ext cx="10515600" cy="365760"/>
+          </a:xfrm>
+          <a:prstGeom prst="rect">
+            <a:avLst/>
+          </a:prstGeom>
+          <a:noFill/>
+        </p:spPr>
+        <p:txBody>
+          <a:bodyPr wrap="square">
+            <a:spAutoFit/>
+          </a:bodyPr>
+          <a:lstStyle/>
+          <a:p>
+            <a:pPr>
+              <a:defRPr sz="1200" b="0">
+                <a:solidFill>
+                  <a:srgbClr val="8A9AAB"/>
+                </a:solidFill>
+                <a:latin typeface="Courier New"/>
+              </a:defRPr>
+            </a:pPr>
+            <a:r>
+              <a:t>metanorma.github.io/basicdoc-models · github.com/metanorma/basicdoc-models · CC/ISO 36010</a:t>
             </a:r>
           </a:p>
         </p:txBody>
@@ -3346,7 +4408,7 @@
         <p:spPr>
           <a:xfrm>
             <a:off x="0" y="0"/>
-            <a:ext cx="12191695" cy="128016"/>
+            <a:ext cx="12191695" cy="109728"/>
           </a:xfrm>
           <a:prstGeom prst="rect">
             <a:avLst/>
@@ -3388,7 +4450,7 @@
         </p:nvSpPr>
         <p:spPr>
           <a:xfrm>
-            <a:off x="822960" y="502920"/>
+            <a:off x="822960" y="457200"/>
             <a:ext cx="10515600" cy="365760"/>
           </a:xfrm>
           <a:prstGeom prst="rect">
@@ -3403,7 +4465,7 @@
           <a:lstStyle/>
           <a:p>
             <a:pPr>
-              <a:defRPr sz="1300" b="0">
+              <a:defRPr sz="1400" b="0">
                 <a:solidFill>
                   <a:srgbClr val="2F6F82"/>
                 </a:solidFill>
@@ -3411,7 +4473,7 @@
               </a:defRPr>
             </a:pPr>
             <a:r>
-              <a:t>THE PROBLEM</a:t>
+              <a:t>THE PROBLEM EVERY TEAM KNOWS</a:t>
             </a:r>
           </a:p>
         </p:txBody>
@@ -3424,8 +4486,8 @@
         </p:nvSpPr>
         <p:spPr>
           <a:xfrm>
-            <a:off x="822960" y="868680"/>
-            <a:ext cx="10515600" cy="1005840"/>
+            <a:off x="822960" y="841248"/>
+            <a:ext cx="10515600" cy="960120"/>
           </a:xfrm>
           <a:prstGeom prst="rect">
             <a:avLst/>
@@ -3439,28 +4501,52 @@
           <a:lstStyle/>
           <a:p>
             <a:pPr>
-              <a:defRPr sz="4000" b="1">
+              <a:defRPr sz="3400" b="1">
                 <a:solidFill>
                   <a:srgbClr val="0A1628"/>
                 </a:solidFill>
               </a:defRPr>
             </a:pPr>
             <a:r>
-              <a:t>Structured text has no interoperability layer</a:t>
-            </a:r>
-          </a:p>
-        </p:txBody>
-      </p:sp>
-      <p:sp>
-        <p:nvSpPr>
-          <p:cNvPr id="5" name="TextBox 4"/>
+              <a:t>Same meaning, five languages — and none of them travel</a:t>
+            </a:r>
+          </a:p>
+        </p:txBody>
+      </p:sp>
+      <p:pic>
+        <p:nvPicPr>
+          <p:cNvPr id="5" name="Picture 4" descr="d1-meaning-lost.png"/>
+          <p:cNvPicPr>
+            <a:picLocks noChangeAspect="1"/>
+          </p:cNvPicPr>
+          <p:nvPr/>
+        </p:nvPicPr>
+        <p:blipFill>
+          <a:blip r:embed="rId2"/>
+          <a:stretch>
+            <a:fillRect/>
+          </a:stretch>
+        </p:blipFill>
+        <p:spPr>
+          <a:xfrm>
+            <a:off x="1809597" y="1554480"/>
+            <a:ext cx="8572500" cy="4572000"/>
+          </a:xfrm>
+          <a:prstGeom prst="rect">
+            <a:avLst/>
+          </a:prstGeom>
+        </p:spPr>
+      </p:pic>
+      <p:sp>
+        <p:nvSpPr>
+          <p:cNvPr id="6" name="TextBox 5"/>
           <p:cNvSpPr txBox="1"/>
           <p:nvPr/>
         </p:nvSpPr>
         <p:spPr>
           <a:xfrm>
-            <a:off x="822960" y="1828800"/>
-            <a:ext cx="3108960" cy="457200"/>
+            <a:off x="822960" y="6446520"/>
+            <a:ext cx="10515600" cy="320040"/>
           </a:xfrm>
           <a:prstGeom prst="rect">
             <a:avLst/>
@@ -3474,286 +4560,6 @@
           <a:lstStyle/>
           <a:p>
             <a:pPr>
-              <a:defRPr sz="1700" b="1">
-                <a:solidFill>
-                  <a:srgbClr val="B85A2A"/>
-                </a:solidFill>
-              </a:defRPr>
-            </a:pPr>
-            <a:r>
-              <a:t>Fragmented markups</a:t>
-            </a:r>
-          </a:p>
-        </p:txBody>
-      </p:sp>
-      <p:sp>
-        <p:nvSpPr>
-          <p:cNvPr id="6" name="TextBox 5"/>
-          <p:cNvSpPr txBox="1"/>
-          <p:nvPr/>
-        </p:nvSpPr>
-        <p:spPr>
-          <a:xfrm>
-            <a:off x="4114800" y="1828800"/>
-            <a:ext cx="7315200" cy="822960"/>
-          </a:xfrm>
-          <a:prstGeom prst="rect">
-            <a:avLst/>
-          </a:prstGeom>
-          <a:noFill/>
-        </p:spPr>
-        <p:txBody>
-          <a:bodyPr wrap="square">
-            <a:spAutoFit/>
-          </a:bodyPr>
-          <a:lstStyle/>
-          <a:p>
-            <a:pPr>
-              <a:defRPr sz="1500" b="0">
-                <a:solidFill>
-                  <a:srgbClr val="243647"/>
-                </a:solidFill>
-              </a:defRPr>
-            </a:pPr>
-            <a:r>
-              <a:t>Markdown, AsciiDoc, reStructuredText — same ideas, incompatible syntaxes and semantics</a:t>
-            </a:r>
-          </a:p>
-        </p:txBody>
-      </p:sp>
-      <p:sp>
-        <p:nvSpPr>
-          <p:cNvPr id="7" name="TextBox 6"/>
-          <p:cNvSpPr txBox="1"/>
-          <p:nvPr/>
-        </p:nvSpPr>
-        <p:spPr>
-          <a:xfrm>
-            <a:off x="822960" y="2880360"/>
-            <a:ext cx="3108960" cy="457200"/>
-          </a:xfrm>
-          <a:prstGeom prst="rect">
-            <a:avLst/>
-          </a:prstGeom>
-          <a:noFill/>
-        </p:spPr>
-        <p:txBody>
-          <a:bodyPr wrap="square">
-            <a:spAutoFit/>
-          </a:bodyPr>
-          <a:lstStyle/>
-          <a:p>
-            <a:pPr>
-              <a:defRPr sz="1700" b="1">
-                <a:solidFill>
-                  <a:srgbClr val="B85A2A"/>
-                </a:solidFill>
-              </a:defRPr>
-            </a:pPr>
-            <a:r>
-              <a:t>Lossy conversion</a:t>
-            </a:r>
-          </a:p>
-        </p:txBody>
-      </p:sp>
-      <p:sp>
-        <p:nvSpPr>
-          <p:cNvPr id="8" name="TextBox 7"/>
-          <p:cNvSpPr txBox="1"/>
-          <p:nvPr/>
-        </p:nvSpPr>
-        <p:spPr>
-          <a:xfrm>
-            <a:off x="4114800" y="2880360"/>
-            <a:ext cx="7315200" cy="822960"/>
-          </a:xfrm>
-          <a:prstGeom prst="rect">
-            <a:avLst/>
-          </a:prstGeom>
-          <a:noFill/>
-        </p:spPr>
-        <p:txBody>
-          <a:bodyPr wrap="square">
-            <a:spAutoFit/>
-          </a:bodyPr>
-          <a:lstStyle/>
-          <a:p>
-            <a:pPr>
-              <a:defRPr sz="1500" b="0">
-                <a:solidFill>
-                  <a:srgbClr val="243647"/>
-                </a:solidFill>
-              </a:defRPr>
-            </a:pPr>
-            <a:r>
-              <a:t>Format-to-format converters drop semantics; exchange degrades to plain text, the lowest common denominator</a:t>
-            </a:r>
-          </a:p>
-        </p:txBody>
-      </p:sp>
-      <p:sp>
-        <p:nvSpPr>
-          <p:cNvPr id="9" name="TextBox 8"/>
-          <p:cNvSpPr txBox="1"/>
-          <p:nvPr/>
-        </p:nvSpPr>
-        <p:spPr>
-          <a:xfrm>
-            <a:off x="822960" y="3931920"/>
-            <a:ext cx="3108960" cy="457200"/>
-          </a:xfrm>
-          <a:prstGeom prst="rect">
-            <a:avLst/>
-          </a:prstGeom>
-          <a:noFill/>
-        </p:spPr>
-        <p:txBody>
-          <a:bodyPr wrap="square">
-            <a:spAutoFit/>
-          </a:bodyPr>
-          <a:lstStyle/>
-          <a:p>
-            <a:pPr>
-              <a:defRPr sz="1700" b="1">
-                <a:solidFill>
-                  <a:srgbClr val="B85A2A"/>
-                </a:solidFill>
-              </a:defRPr>
-            </a:pPr>
-            <a:r>
-              <a:t>No shared reference model</a:t>
-            </a:r>
-          </a:p>
-        </p:txBody>
-      </p:sp>
-      <p:sp>
-        <p:nvSpPr>
-          <p:cNvPr id="10" name="TextBox 9"/>
-          <p:cNvSpPr txBox="1"/>
-          <p:nvPr/>
-        </p:nvSpPr>
-        <p:spPr>
-          <a:xfrm>
-            <a:off x="4114800" y="3931920"/>
-            <a:ext cx="7315200" cy="822960"/>
-          </a:xfrm>
-          <a:prstGeom prst="rect">
-            <a:avLst/>
-          </a:prstGeom>
-          <a:noFill/>
-        </p:spPr>
-        <p:txBody>
-          <a:bodyPr wrap="square">
-            <a:spAutoFit/>
-          </a:bodyPr>
-          <a:lstStyle/>
-          <a:p>
-            <a:pPr>
-              <a:defRPr sz="1500" b="0">
-                <a:solidFill>
-                  <a:srgbClr val="243647"/>
-                </a:solidFill>
-              </a:defRPr>
-            </a:pPr>
-            <a:r>
-              <a:t>HTML/DocBook/TEI describe rendering or publishing, not a lightweight interchange structure</a:t>
-            </a:r>
-          </a:p>
-        </p:txBody>
-      </p:sp>
-      <p:sp>
-        <p:nvSpPr>
-          <p:cNvPr id="11" name="TextBox 10"/>
-          <p:cNvSpPr txBox="1"/>
-          <p:nvPr/>
-        </p:nvSpPr>
-        <p:spPr>
-          <a:xfrm>
-            <a:off x="822960" y="4983479"/>
-            <a:ext cx="3108960" cy="457200"/>
-          </a:xfrm>
-          <a:prstGeom prst="rect">
-            <a:avLst/>
-          </a:prstGeom>
-          <a:noFill/>
-        </p:spPr>
-        <p:txBody>
-          <a:bodyPr wrap="square">
-            <a:spAutoFit/>
-          </a:bodyPr>
-          <a:lstStyle/>
-          <a:p>
-            <a:pPr>
-              <a:defRPr sz="1700" b="1">
-                <a:solidFill>
-                  <a:srgbClr val="B85A2A"/>
-                </a:solidFill>
-              </a:defRPr>
-            </a:pPr>
-            <a:r>
-              <a:t>Collaboration gap</a:t>
-            </a:r>
-          </a:p>
-        </p:txBody>
-      </p:sp>
-      <p:sp>
-        <p:nvSpPr>
-          <p:cNvPr id="12" name="TextBox 11"/>
-          <p:cNvSpPr txBox="1"/>
-          <p:nvPr/>
-        </p:nvSpPr>
-        <p:spPr>
-          <a:xfrm>
-            <a:off x="4114800" y="4983479"/>
-            <a:ext cx="7315200" cy="822960"/>
-          </a:xfrm>
-          <a:prstGeom prst="rect">
-            <a:avLst/>
-          </a:prstGeom>
-          <a:noFill/>
-        </p:spPr>
-        <p:txBody>
-          <a:bodyPr wrap="square">
-            <a:spAutoFit/>
-          </a:bodyPr>
-          <a:lstStyle/>
-          <a:p>
-            <a:pPr>
-              <a:defRPr sz="1500" b="0">
-                <a:solidFill>
-                  <a:srgbClr val="243647"/>
-                </a:solidFill>
-              </a:defRPr>
-            </a:pPr>
-            <a:r>
-              <a:t>Documents edited by many parties need defined, incremental change — no common model to patch</a:t>
-            </a:r>
-          </a:p>
-        </p:txBody>
-      </p:sp>
-      <p:sp>
-        <p:nvSpPr>
-          <p:cNvPr id="13" name="TextBox 12"/>
-          <p:cNvSpPr txBox="1"/>
-          <p:nvPr/>
-        </p:nvSpPr>
-        <p:spPr>
-          <a:xfrm>
-            <a:off x="822960" y="6400800"/>
-            <a:ext cx="10515600" cy="365760"/>
-          </a:xfrm>
-          <a:prstGeom prst="rect">
-            <a:avLst/>
-          </a:prstGeom>
-          <a:noFill/>
-        </p:spPr>
-        <p:txBody>
-          <a:bodyPr wrap="square">
-            <a:spAutoFit/>
-          </a:bodyPr>
-          <a:lstStyle/>
-          <a:p>
-            <a:pPr>
               <a:defRPr sz="1000" b="0">
                 <a:solidFill>
                   <a:srgbClr val="8A9AAB"/>
@@ -3761,7 +4567,7 @@
               </a:defRPr>
             </a:pPr>
             <a:r>
-              <a:t>CalConnect proposal to ISO/TC 154  ·  CC/ISO 36010  ·  2</a:t>
+              <a:t>CalConnect → ISO/TC 154 · CC/ISO 36010 · 2</a:t>
             </a:r>
           </a:p>
         </p:txBody>
@@ -3801,7 +4607,7 @@
         <p:spPr>
           <a:xfrm>
             <a:off x="0" y="0"/>
-            <a:ext cx="12191695" cy="128016"/>
+            <a:ext cx="12191695" cy="109728"/>
           </a:xfrm>
           <a:prstGeom prst="rect">
             <a:avLst/>
@@ -3843,7 +4649,7 @@
         </p:nvSpPr>
         <p:spPr>
           <a:xfrm>
-            <a:off x="822960" y="502920"/>
+            <a:off x="822960" y="457200"/>
             <a:ext cx="10515600" cy="365760"/>
           </a:xfrm>
           <a:prstGeom prst="rect">
@@ -3858,7 +4664,7 @@
           <a:lstStyle/>
           <a:p>
             <a:pPr>
-              <a:defRPr sz="1300" b="0">
+              <a:defRPr sz="1400" b="0">
                 <a:solidFill>
                   <a:srgbClr val="2F6F82"/>
                 </a:solidFill>
@@ -3866,7 +4672,7 @@
               </a:defRPr>
             </a:pPr>
             <a:r>
-              <a:t>THE ANSWER</a:t>
+              <a:t>“DOESN’T SOMETHING LIKE THIS EXIST?”</a:t>
             </a:r>
           </a:p>
         </p:txBody>
@@ -3879,8 +4685,8 @@
         </p:nvSpPr>
         <p:spPr>
           <a:xfrm>
-            <a:off x="822960" y="868680"/>
-            <a:ext cx="10515600" cy="1005840"/>
+            <a:off x="822960" y="841248"/>
+            <a:ext cx="10515600" cy="960120"/>
           </a:xfrm>
           <a:prstGeom prst="rect">
             <a:avLst/>
@@ -3894,28 +4700,52 @@
           <a:lstStyle/>
           <a:p>
             <a:pPr>
-              <a:defRPr sz="4000" b="1">
+              <a:defRPr sz="3400" b="1">
                 <a:solidFill>
                   <a:srgbClr val="0A1628"/>
                 </a:solidFill>
               </a:defRPr>
             </a:pPr>
             <a:r>
-              <a:t>BasicDocument: a lightweight document metamodel</a:t>
-            </a:r>
-          </a:p>
-        </p:txBody>
-      </p:sp>
-      <p:sp>
-        <p:nvSpPr>
-          <p:cNvPr id="5" name="TextBox 4"/>
+              <a:t>No. Every layer exists — except the one that carries meaning</a:t>
+            </a:r>
+          </a:p>
+        </p:txBody>
+      </p:sp>
+      <p:pic>
+        <p:nvPicPr>
+          <p:cNvPr id="5" name="Picture 4" descr="d2-missing-layer.png"/>
+          <p:cNvPicPr>
+            <a:picLocks noChangeAspect="1"/>
+          </p:cNvPicPr>
+          <p:nvPr/>
+        </p:nvPicPr>
+        <p:blipFill>
+          <a:blip r:embed="rId2"/>
+          <a:stretch>
+            <a:fillRect/>
+          </a:stretch>
+        </p:blipFill>
+        <p:spPr>
+          <a:xfrm>
+            <a:off x="2059424" y="1554480"/>
+            <a:ext cx="8072845" cy="4709160"/>
+          </a:xfrm>
+          <a:prstGeom prst="rect">
+            <a:avLst/>
+          </a:prstGeom>
+        </p:spPr>
+      </p:pic>
+      <p:sp>
+        <p:nvSpPr>
+          <p:cNvPr id="6" name="TextBox 5"/>
           <p:cNvSpPr txBox="1"/>
           <p:nvPr/>
         </p:nvSpPr>
         <p:spPr>
           <a:xfrm>
-            <a:off x="822960" y="1737360"/>
-            <a:ext cx="10515600" cy="731520"/>
+            <a:off x="822960" y="6446520"/>
+            <a:ext cx="10515600" cy="320040"/>
           </a:xfrm>
           <a:prstGeom prst="rect">
             <a:avLst/>
@@ -3929,403 +4759,6 @@
           <a:lstStyle/>
           <a:p>
             <a:pPr>
-              <a:defRPr sz="1700" b="0">
-                <a:solidFill>
-                  <a:srgbClr val="243647"/>
-                </a:solidFill>
-              </a:defRPr>
-            </a:pPr>
-            <a:r>
-              <a:t>A minimal, complete model of generic documents — documents are sections,</a:t>
-            </a:r>
-          </a:p>
-          <a:p>
-            <a:pPr>
-              <a:defRPr sz="1700" b="0">
-                <a:solidFill>
-                  <a:srgbClr val="243647"/>
-                </a:solidFill>
-              </a:defRPr>
-            </a:pPr>
-            <a:r>
-              <a:t>sections are blocks, blocks are inline elements. The tiers never mix.</a:t>
-            </a:r>
-          </a:p>
-        </p:txBody>
-      </p:sp>
-      <p:sp>
-        <p:nvSpPr>
-          <p:cNvPr id="6" name="TextBox 5"/>
-          <p:cNvSpPr txBox="1"/>
-          <p:nvPr/>
-        </p:nvSpPr>
-        <p:spPr>
-          <a:xfrm>
-            <a:off x="822960" y="2834640"/>
-            <a:ext cx="2377440" cy="457200"/>
-          </a:xfrm>
-          <a:prstGeom prst="rect">
-            <a:avLst/>
-          </a:prstGeom>
-          <a:noFill/>
-        </p:spPr>
-        <p:txBody>
-          <a:bodyPr wrap="square">
-            <a:spAutoFit/>
-          </a:bodyPr>
-          <a:lstStyle/>
-          <a:p>
-            <a:pPr>
-              <a:defRPr sz="1600" b="1">
-                <a:solidFill>
-                  <a:srgbClr val="2F6F82"/>
-                </a:solidFill>
-              </a:defRPr>
-            </a:pPr>
-            <a:r>
-              <a:t>Harmonized</a:t>
-            </a:r>
-          </a:p>
-        </p:txBody>
-      </p:sp>
-      <p:sp>
-        <p:nvSpPr>
-          <p:cNvPr id="7" name="TextBox 6"/>
-          <p:cNvSpPr txBox="1"/>
-          <p:nvPr/>
-        </p:nvSpPr>
-        <p:spPr>
-          <a:xfrm>
-            <a:off x="3383280" y="2834640"/>
-            <a:ext cx="8046720" cy="640080"/>
-          </a:xfrm>
-          <a:prstGeom prst="rect">
-            <a:avLst/>
-          </a:prstGeom>
-          <a:noFill/>
-        </p:spPr>
-        <p:txBody>
-          <a:bodyPr wrap="square">
-            <a:spAutoFit/>
-          </a:bodyPr>
-          <a:lstStyle/>
-          <a:p>
-            <a:pPr>
-              <a:defRPr sz="1400" b="0">
-                <a:solidFill>
-                  <a:srgbClr val="243647"/>
-                </a:solidFill>
-              </a:defRPr>
-            </a:pPr>
-            <a:r>
-              <a:t>Every markup construct maps onto one shared model (Annex A: AsciiDoc, Markdown/GFM/Pandoc, RST)</a:t>
-            </a:r>
-          </a:p>
-        </p:txBody>
-      </p:sp>
-      <p:sp>
-        <p:nvSpPr>
-          <p:cNvPr id="8" name="TextBox 7"/>
-          <p:cNvSpPr txBox="1"/>
-          <p:nvPr/>
-        </p:nvSpPr>
-        <p:spPr>
-          <a:xfrm>
-            <a:off x="822960" y="3493008"/>
-            <a:ext cx="2377440" cy="457200"/>
-          </a:xfrm>
-          <a:prstGeom prst="rect">
-            <a:avLst/>
-          </a:prstGeom>
-          <a:noFill/>
-        </p:spPr>
-        <p:txBody>
-          <a:bodyPr wrap="square">
-            <a:spAutoFit/>
-          </a:bodyPr>
-          <a:lstStyle/>
-          <a:p>
-            <a:pPr>
-              <a:defRPr sz="1600" b="1">
-                <a:solidFill>
-                  <a:srgbClr val="2F6F82"/>
-                </a:solidFill>
-              </a:defRPr>
-            </a:pPr>
-            <a:r>
-              <a:t>Lightweight</a:t>
-            </a:r>
-          </a:p>
-        </p:txBody>
-      </p:sp>
-      <p:sp>
-        <p:nvSpPr>
-          <p:cNvPr id="9" name="TextBox 8"/>
-          <p:cNvSpPr txBox="1"/>
-          <p:nvPr/>
-        </p:nvSpPr>
-        <p:spPr>
-          <a:xfrm>
-            <a:off x="3383280" y="3493008"/>
-            <a:ext cx="8046720" cy="640080"/>
-          </a:xfrm>
-          <a:prstGeom prst="rect">
-            <a:avLst/>
-          </a:prstGeom>
-          <a:noFill/>
-        </p:spPr>
-        <p:txBody>
-          <a:bodyPr wrap="square">
-            <a:spAutoFit/>
-          </a:bodyPr>
-          <a:lstStyle/>
-          <a:p>
-            <a:pPr>
-              <a:defRPr sz="1400" b="0">
-                <a:solidFill>
-                  <a:srgbClr val="243647"/>
-                </a:solidFill>
-              </a:defRPr>
-            </a:pPr>
-            <a:r>
-              <a:t>Deliberately not DocBook/TEI: a base others map to, specialize upon, or use for interchange</a:t>
-            </a:r>
-          </a:p>
-        </p:txBody>
-      </p:sp>
-      <p:sp>
-        <p:nvSpPr>
-          <p:cNvPr id="10" name="TextBox 9"/>
-          <p:cNvSpPr txBox="1"/>
-          <p:nvPr/>
-        </p:nvSpPr>
-        <p:spPr>
-          <a:xfrm>
-            <a:off x="822960" y="4151376"/>
-            <a:ext cx="2377440" cy="457200"/>
-          </a:xfrm>
-          <a:prstGeom prst="rect">
-            <a:avLst/>
-          </a:prstGeom>
-          <a:noFill/>
-        </p:spPr>
-        <p:txBody>
-          <a:bodyPr wrap="square">
-            <a:spAutoFit/>
-          </a:bodyPr>
-          <a:lstStyle/>
-          <a:p>
-            <a:pPr>
-              <a:defRPr sz="1600" b="1">
-                <a:solidFill>
-                  <a:srgbClr val="2F6F82"/>
-                </a:solidFill>
-              </a:defRPr>
-            </a:pPr>
-            <a:r>
-              <a:t>Specializable</a:t>
-            </a:r>
-          </a:p>
-        </p:txBody>
-      </p:sp>
-      <p:sp>
-        <p:nvSpPr>
-          <p:cNvPr id="11" name="TextBox 10"/>
-          <p:cNvSpPr txBox="1"/>
-          <p:nvPr/>
-        </p:nvSpPr>
-        <p:spPr>
-          <a:xfrm>
-            <a:off x="3383280" y="4151376"/>
-            <a:ext cx="8046720" cy="640080"/>
-          </a:xfrm>
-          <a:prstGeom prst="rect">
-            <a:avLst/>
-          </a:prstGeom>
-          <a:noFill/>
-        </p:spPr>
-        <p:txBody>
-          <a:bodyPr wrap="square">
-            <a:spAutoFit/>
-          </a:bodyPr>
-          <a:lstStyle/>
-          <a:p>
-            <a:pPr>
-              <a:defRPr sz="1400" b="0">
-                <a:solidFill>
-                  <a:srgbClr val="243647"/>
-                </a:solidFill>
-              </a:defRPr>
-            </a:pPr>
-            <a:r>
-              <a:t>Markup-specific kinds arrive as type values and attribute overrides — never parallel classes</a:t>
-            </a:r>
-          </a:p>
-        </p:txBody>
-      </p:sp>
-      <p:sp>
-        <p:nvSpPr>
-          <p:cNvPr id="12" name="TextBox 11"/>
-          <p:cNvSpPr txBox="1"/>
-          <p:nvPr/>
-        </p:nvSpPr>
-        <p:spPr>
-          <a:xfrm>
-            <a:off x="822960" y="4809744"/>
-            <a:ext cx="2377440" cy="457200"/>
-          </a:xfrm>
-          <a:prstGeom prst="rect">
-            <a:avLst/>
-          </a:prstGeom>
-          <a:noFill/>
-        </p:spPr>
-        <p:txBody>
-          <a:bodyPr wrap="square">
-            <a:spAutoFit/>
-          </a:bodyPr>
-          <a:lstStyle/>
-          <a:p>
-            <a:pPr>
-              <a:defRPr sz="1600" b="1">
-                <a:solidFill>
-                  <a:srgbClr val="2F6F82"/>
-                </a:solidFill>
-              </a:defRPr>
-            </a:pPr>
-            <a:r>
-              <a:t>Extensible</a:t>
-            </a:r>
-          </a:p>
-        </p:txBody>
-      </p:sp>
-      <p:sp>
-        <p:nvSpPr>
-          <p:cNvPr id="13" name="TextBox 12"/>
-          <p:cNvSpPr txBox="1"/>
-          <p:nvPr/>
-        </p:nvSpPr>
-        <p:spPr>
-          <a:xfrm>
-            <a:off x="3383280" y="4809744"/>
-            <a:ext cx="8046720" cy="640080"/>
-          </a:xfrm>
-          <a:prstGeom prst="rect">
-            <a:avLst/>
-          </a:prstGeom>
-          <a:noFill/>
-        </p:spPr>
-        <p:txBody>
-          <a:bodyPr wrap="square">
-            <a:spAutoFit/>
-          </a:bodyPr>
-          <a:lstStyle/>
-          <a:p>
-            <a:pPr>
-              <a:defRPr sz="1400" b="0">
-                <a:solidFill>
-                  <a:srgbClr val="243647"/>
-                </a:solidFill>
-              </a:defRPr>
-            </a:pPr>
-            <a:r>
-              <a:t>An open attribute register, opaque raw content, and variable references — no model change needed</a:t>
-            </a:r>
-          </a:p>
-        </p:txBody>
-      </p:sp>
-      <p:sp>
-        <p:nvSpPr>
-          <p:cNvPr id="14" name="TextBox 13"/>
-          <p:cNvSpPr txBox="1"/>
-          <p:nvPr/>
-        </p:nvSpPr>
-        <p:spPr>
-          <a:xfrm>
-            <a:off x="822960" y="5468112"/>
-            <a:ext cx="2377440" cy="457200"/>
-          </a:xfrm>
-          <a:prstGeom prst="rect">
-            <a:avLst/>
-          </a:prstGeom>
-          <a:noFill/>
-        </p:spPr>
-        <p:txBody>
-          <a:bodyPr wrap="square">
-            <a:spAutoFit/>
-          </a:bodyPr>
-          <a:lstStyle/>
-          <a:p>
-            <a:pPr>
-              <a:defRPr sz="1600" b="1">
-                <a:solidFill>
-                  <a:srgbClr val="2F6F82"/>
-                </a:solidFill>
-              </a:defRPr>
-            </a:pPr>
-            <a:r>
-              <a:t>Collaborative</a:t>
-            </a:r>
-          </a:p>
-        </p:txBody>
-      </p:sp>
-      <p:sp>
-        <p:nvSpPr>
-          <p:cNvPr id="15" name="TextBox 14"/>
-          <p:cNvSpPr txBox="1"/>
-          <p:nvPr/>
-        </p:nvSpPr>
-        <p:spPr>
-          <a:xfrm>
-            <a:off x="3383280" y="5468112"/>
-            <a:ext cx="8046720" cy="640080"/>
-          </a:xfrm>
-          <a:prstGeom prst="rect">
-            <a:avLst/>
-          </a:prstGeom>
-          <a:noFill/>
-        </p:spPr>
-        <p:txBody>
-          <a:bodyPr wrap="square">
-            <a:spAutoFit/>
-          </a:bodyPr>
-          <a:lstStyle/>
-          <a:p>
-            <a:pPr>
-              <a:defRPr sz="1400" b="0">
-                <a:solidFill>
-                  <a:srgbClr val="243647"/>
-                </a:solidFill>
-              </a:defRPr>
-            </a:pPr>
-            <a:r>
-              <a:t>Change models apply patches incrementally: insert, delete, move, modify</a:t>
-            </a:r>
-          </a:p>
-        </p:txBody>
-      </p:sp>
-      <p:sp>
-        <p:nvSpPr>
-          <p:cNvPr id="16" name="TextBox 15"/>
-          <p:cNvSpPr txBox="1"/>
-          <p:nvPr/>
-        </p:nvSpPr>
-        <p:spPr>
-          <a:xfrm>
-            <a:off x="822960" y="6400800"/>
-            <a:ext cx="10515600" cy="365760"/>
-          </a:xfrm>
-          <a:prstGeom prst="rect">
-            <a:avLst/>
-          </a:prstGeom>
-          <a:noFill/>
-        </p:spPr>
-        <p:txBody>
-          <a:bodyPr wrap="square">
-            <a:spAutoFit/>
-          </a:bodyPr>
-          <a:lstStyle/>
-          <a:p>
-            <a:pPr>
               <a:defRPr sz="1000" b="0">
                 <a:solidFill>
                   <a:srgbClr val="8A9AAB"/>
@@ -4333,7 +4766,7 @@
               </a:defRPr>
             </a:pPr>
             <a:r>
-              <a:t>CalConnect proposal to ISO/TC 154  ·  CC/ISO 36010  ·  3</a:t>
+              <a:t>CalConnect → ISO/TC 154 · CC/ISO 36010 · 3</a:t>
             </a:r>
           </a:p>
         </p:txBody>
@@ -4373,7 +4806,7 @@
         <p:spPr>
           <a:xfrm>
             <a:off x="0" y="0"/>
-            <a:ext cx="12191695" cy="128016"/>
+            <a:ext cx="12191695" cy="109728"/>
           </a:xfrm>
           <a:prstGeom prst="rect">
             <a:avLst/>
@@ -4415,7 +4848,7 @@
         </p:nvSpPr>
         <p:spPr>
           <a:xfrm>
-            <a:off x="822960" y="502920"/>
+            <a:off x="822960" y="457200"/>
             <a:ext cx="10515600" cy="365760"/>
           </a:xfrm>
           <a:prstGeom prst="rect">
@@ -4430,7 +4863,7 @@
           <a:lstStyle/>
           <a:p>
             <a:pPr>
-              <a:defRPr sz="1300" b="0">
+              <a:defRPr sz="1400" b="0">
                 <a:solidFill>
                   <a:srgbClr val="2F6F82"/>
                 </a:solidFill>
@@ -4438,7 +4871,7 @@
               </a:defRPr>
             </a:pPr>
             <a:r>
-              <a:t>EVIDENCE</a:t>
+              <a:t>“AREN’T HTML AND RTF ALREADY THAT LAYER?”</a:t>
             </a:r>
           </a:p>
         </p:txBody>
@@ -4451,8 +4884,8 @@
         </p:nvSpPr>
         <p:spPr>
           <a:xfrm>
-            <a:off x="822960" y="868680"/>
-            <a:ext cx="10515600" cy="1005840"/>
+            <a:off x="822960" y="841248"/>
+            <a:ext cx="10515600" cy="960120"/>
           </a:xfrm>
           <a:prstGeom prst="rect">
             <a:avLst/>
@@ -4466,28 +4899,52 @@
           <a:lstStyle/>
           <a:p>
             <a:pPr>
-              <a:defRPr sz="4000" b="1">
+              <a:defRPr sz="3400" b="1">
                 <a:solidFill>
                   <a:srgbClr val="0A1628"/>
                 </a:solidFill>
               </a:defRPr>
             </a:pPr>
             <a:r>
-              <a:t>Proven in production, not a paper model</a:t>
-            </a:r>
-          </a:p>
-        </p:txBody>
-      </p:sp>
-      <p:sp>
-        <p:nvSpPr>
-          <p:cNvPr id="5" name="TextBox 4"/>
+              <a:t>HTML and RTF say how text looks — not what it means</a:t>
+            </a:r>
+          </a:p>
+        </p:txBody>
+      </p:sp>
+      <p:pic>
+        <p:nvPicPr>
+          <p:cNvPr id="5" name="Picture 4" descr="d3-not-a-serialization.png"/>
+          <p:cNvPicPr>
+            <a:picLocks noChangeAspect="1"/>
+          </p:cNvPicPr>
+          <p:nvPr/>
+        </p:nvPicPr>
+        <p:blipFill>
+          <a:blip r:embed="rId2"/>
+          <a:stretch>
+            <a:fillRect/>
+          </a:stretch>
+        </p:blipFill>
+        <p:spPr>
+          <a:xfrm>
+            <a:off x="1938185" y="1554480"/>
+            <a:ext cx="8315324" cy="4434840"/>
+          </a:xfrm>
+          <a:prstGeom prst="rect">
+            <a:avLst/>
+          </a:prstGeom>
+        </p:spPr>
+      </p:pic>
+      <p:sp>
+        <p:nvSpPr>
+          <p:cNvPr id="6" name="TextBox 5"/>
           <p:cNvSpPr txBox="1"/>
           <p:nvPr/>
         </p:nvSpPr>
         <p:spPr>
           <a:xfrm>
-            <a:off x="822960" y="1828800"/>
-            <a:ext cx="3291840" cy="457200"/>
+            <a:off x="822960" y="5943600"/>
+            <a:ext cx="10515600" cy="685800"/>
           </a:xfrm>
           <a:prstGeom prst="rect">
             <a:avLst/>
@@ -4508,21 +4965,21 @@
               </a:defRPr>
             </a:pPr>
             <a:r>
-              <a:t>Metanorma</a:t>
-            </a:r>
-          </a:p>
-        </p:txBody>
-      </p:sp>
-      <p:sp>
-        <p:nvSpPr>
-          <p:cNvPr id="6" name="TextBox 5"/>
+              <a:t>The metamodel is what all of them mean. Rendering stays exactly where it is.</a:t>
+            </a:r>
+          </a:p>
+        </p:txBody>
+      </p:sp>
+      <p:sp>
+        <p:nvSpPr>
+          <p:cNvPr id="7" name="TextBox 6"/>
           <p:cNvSpPr txBox="1"/>
           <p:nvPr/>
         </p:nvSpPr>
         <p:spPr>
           <a:xfrm>
-            <a:off x="4297680" y="1828800"/>
-            <a:ext cx="7132320" cy="822960"/>
+            <a:off x="822960" y="6446520"/>
+            <a:ext cx="10515600" cy="320040"/>
           </a:xfrm>
           <a:prstGeom prst="rect">
             <a:avLst/>
@@ -4536,321 +4993,6 @@
           <a:lstStyle/>
           <a:p>
             <a:pPr>
-              <a:defRPr sz="1400" b="0">
-                <a:solidFill>
-                  <a:srgbClr val="243647"/>
-                </a:solidFill>
-              </a:defRPr>
-            </a:pPr>
-            <a:r>
-              <a:t>The model underlies standards authoring and publishing across 30+ document flavours (relaton-models, standoc-models)</a:t>
-            </a:r>
-          </a:p>
-        </p:txBody>
-      </p:sp>
-      <p:sp>
-        <p:nvSpPr>
-          <p:cNvPr id="7" name="TextBox 6"/>
-          <p:cNvSpPr txBox="1"/>
-          <p:nvPr/>
-        </p:nvSpPr>
-        <p:spPr>
-          <a:xfrm>
-            <a:off x="822960" y="2697480"/>
-            <a:ext cx="3291840" cy="457200"/>
-          </a:xfrm>
-          <a:prstGeom prst="rect">
-            <a:avLst/>
-          </a:prstGeom>
-          <a:noFill/>
-        </p:spPr>
-        <p:txBody>
-          <a:bodyPr wrap="square">
-            <a:spAutoFit/>
-          </a:bodyPr>
-          <a:lstStyle/>
-          <a:p>
-            <a:pPr>
-              <a:defRPr sz="1600" b="1">
-                <a:solidFill>
-                  <a:srgbClr val="B85A2A"/>
-                </a:solidFill>
-              </a:defRPr>
-            </a:pPr>
-            <a:r>
-              <a:t>Executable conformance</a:t>
-            </a:r>
-          </a:p>
-        </p:txBody>
-      </p:sp>
-      <p:sp>
-        <p:nvSpPr>
-          <p:cNvPr id="8" name="TextBox 7"/>
-          <p:cNvSpPr txBox="1"/>
-          <p:nvPr/>
-        </p:nvSpPr>
-        <p:spPr>
-          <a:xfrm>
-            <a:off x="4297680" y="2697480"/>
-            <a:ext cx="7132320" cy="822960"/>
-          </a:xfrm>
-          <a:prstGeom prst="rect">
-            <a:avLst/>
-          </a:prstGeom>
-          <a:noFill/>
-        </p:spPr>
-        <p:txBody>
-          <a:bodyPr wrap="square">
-            <a:spAutoFit/>
-          </a:bodyPr>
-          <a:lstStyle/>
-          <a:p>
-            <a:pPr>
-              <a:defRPr sz="1400" b="0">
-                <a:solidFill>
-                  <a:srgbClr val="243647"/>
-                </a:solidFill>
-              </a:defRPr>
-            </a:pPr>
-            <a:r>
-              <a:t>Lint, parity, and twin XML/YAML instance gates run in CI — a construct without a serializable instance is unfinished (Annex D)</a:t>
-            </a:r>
-          </a:p>
-        </p:txBody>
-      </p:sp>
-      <p:sp>
-        <p:nvSpPr>
-          <p:cNvPr id="9" name="TextBox 8"/>
-          <p:cNvSpPr txBox="1"/>
-          <p:nvPr/>
-        </p:nvSpPr>
-        <p:spPr>
-          <a:xfrm>
-            <a:off x="822960" y="3566160"/>
-            <a:ext cx="3291840" cy="457200"/>
-          </a:xfrm>
-          <a:prstGeom prst="rect">
-            <a:avLst/>
-          </a:prstGeom>
-          <a:noFill/>
-        </p:spPr>
-        <p:txBody>
-          <a:bodyPr wrap="square">
-            <a:spAutoFit/>
-          </a:bodyPr>
-          <a:lstStyle/>
-          <a:p>
-            <a:pPr>
-              <a:defRPr sz="1600" b="1">
-                <a:solidFill>
-                  <a:srgbClr val="B85A2A"/>
-                </a:solidFill>
-              </a:defRPr>
-            </a:pPr>
-            <a:r>
-              <a:t>Grammar + model in lockstep</a:t>
-            </a:r>
-          </a:p>
-        </p:txBody>
-      </p:sp>
-      <p:sp>
-        <p:nvSpPr>
-          <p:cNvPr id="10" name="TextBox 9"/>
-          <p:cNvSpPr txBox="1"/>
-          <p:nvPr/>
-        </p:nvSpPr>
-        <p:spPr>
-          <a:xfrm>
-            <a:off x="4297680" y="3566160"/>
-            <a:ext cx="7132320" cy="822960"/>
-          </a:xfrm>
-          <a:prstGeom prst="rect">
-            <a:avLst/>
-          </a:prstGeom>
-          <a:noFill/>
-        </p:spPr>
-        <p:txBody>
-          <a:bodyPr wrap="square">
-            <a:spAutoFit/>
-          </a:bodyPr>
-          <a:lstStyle/>
-          <a:p>
-            <a:pPr>
-              <a:defRPr sz="1400" b="0">
-                <a:solidFill>
-                  <a:srgbClr val="243647"/>
-                </a:solidFill>
-              </a:defRPr>
-            </a:pPr>
-            <a:r>
-              <a:t>LML definition modules are the definitive expression; RelaxNG grammars compile and pass regeneration-parity in CI</a:t>
-            </a:r>
-          </a:p>
-        </p:txBody>
-      </p:sp>
-      <p:sp>
-        <p:nvSpPr>
-          <p:cNvPr id="11" name="TextBox 10"/>
-          <p:cNvSpPr txBox="1"/>
-          <p:nvPr/>
-        </p:nvSpPr>
-        <p:spPr>
-          <a:xfrm>
-            <a:off x="822960" y="4434840"/>
-            <a:ext cx="3291840" cy="457200"/>
-          </a:xfrm>
-          <a:prstGeom prst="rect">
-            <a:avLst/>
-          </a:prstGeom>
-          <a:noFill/>
-        </p:spPr>
-        <p:txBody>
-          <a:bodyPr wrap="square">
-            <a:spAutoFit/>
-          </a:bodyPr>
-          <a:lstStyle/>
-          <a:p>
-            <a:pPr>
-              <a:defRPr sz="1600" b="1">
-                <a:solidFill>
-                  <a:srgbClr val="B85A2A"/>
-                </a:solidFill>
-              </a:defRPr>
-            </a:pPr>
-            <a:r>
-              <a:t>Live model atlas</a:t>
-            </a:r>
-          </a:p>
-        </p:txBody>
-      </p:sp>
-      <p:sp>
-        <p:nvSpPr>
-          <p:cNvPr id="12" name="TextBox 11"/>
-          <p:cNvSpPr txBox="1"/>
-          <p:nvPr/>
-        </p:nvSpPr>
-        <p:spPr>
-          <a:xfrm>
-            <a:off x="4297680" y="4434840"/>
-            <a:ext cx="7132320" cy="822960"/>
-          </a:xfrm>
-          <a:prstGeom prst="rect">
-            <a:avLst/>
-          </a:prstGeom>
-          <a:noFill/>
-        </p:spPr>
-        <p:txBody>
-          <a:bodyPr wrap="square">
-            <a:spAutoFit/>
-          </a:bodyPr>
-          <a:lstStyle/>
-          <a:p>
-            <a:pPr>
-              <a:defRPr sz="1400" b="0">
-                <a:solidFill>
-                  <a:srgbClr val="243647"/>
-                </a:solidFill>
-              </a:defRPr>
-            </a:pPr>
-            <a:r>
-              <a:t>metanorma.github.io/basicdoc-models — every diagram plate with full model definitions, hyperlinked types</a:t>
-            </a:r>
-          </a:p>
-        </p:txBody>
-      </p:sp>
-      <p:sp>
-        <p:nvSpPr>
-          <p:cNvPr id="13" name="TextBox 12"/>
-          <p:cNvSpPr txBox="1"/>
-          <p:nvPr/>
-        </p:nvSpPr>
-        <p:spPr>
-          <a:xfrm>
-            <a:off x="822960" y="5303520"/>
-            <a:ext cx="3291840" cy="457200"/>
-          </a:xfrm>
-          <a:prstGeom prst="rect">
-            <a:avLst/>
-          </a:prstGeom>
-          <a:noFill/>
-        </p:spPr>
-        <p:txBody>
-          <a:bodyPr wrap="square">
-            <a:spAutoFit/>
-          </a:bodyPr>
-          <a:lstStyle/>
-          <a:p>
-            <a:pPr>
-              <a:defRPr sz="1600" b="1">
-                <a:solidFill>
-                  <a:srgbClr val="B85A2A"/>
-                </a:solidFill>
-              </a:defRPr>
-            </a:pPr>
-            <a:r>
-              <a:t>Registry integration</a:t>
-            </a:r>
-          </a:p>
-        </p:txBody>
-      </p:sp>
-      <p:sp>
-        <p:nvSpPr>
-          <p:cNvPr id="14" name="TextBox 13"/>
-          <p:cNvSpPr txBox="1"/>
-          <p:nvPr/>
-        </p:nvSpPr>
-        <p:spPr>
-          <a:xfrm>
-            <a:off x="4297680" y="5303520"/>
-            <a:ext cx="7132320" cy="822960"/>
-          </a:xfrm>
-          <a:prstGeom prst="rect">
-            <a:avLst/>
-          </a:prstGeom>
-          <a:noFill/>
-        </p:spPr>
-        <p:txBody>
-          <a:bodyPr wrap="square">
-            <a:spAutoFit/>
-          </a:bodyPr>
-          <a:lstStyle/>
-          <a:p>
-            <a:pPr>
-              <a:defRPr sz="1400" b="0">
-                <a:solidFill>
-                  <a:srgbClr val="243647"/>
-                </a:solidFill>
-              </a:defRPr>
-            </a:pPr>
-            <a:r>
-              <a:t>Localized strings identify spelling systems per ISO 24229; romanization schemes by system code</a:t>
-            </a:r>
-          </a:p>
-        </p:txBody>
-      </p:sp>
-      <p:sp>
-        <p:nvSpPr>
-          <p:cNvPr id="15" name="TextBox 14"/>
-          <p:cNvSpPr txBox="1"/>
-          <p:nvPr/>
-        </p:nvSpPr>
-        <p:spPr>
-          <a:xfrm>
-            <a:off x="822960" y="6400800"/>
-            <a:ext cx="10515600" cy="365760"/>
-          </a:xfrm>
-          <a:prstGeom prst="rect">
-            <a:avLst/>
-          </a:prstGeom>
-          <a:noFill/>
-        </p:spPr>
-        <p:txBody>
-          <a:bodyPr wrap="square">
-            <a:spAutoFit/>
-          </a:bodyPr>
-          <a:lstStyle/>
-          <a:p>
-            <a:pPr>
               <a:defRPr sz="1000" b="0">
                 <a:solidFill>
                   <a:srgbClr val="8A9AAB"/>
@@ -4858,7 +5000,7 @@
               </a:defRPr>
             </a:pPr>
             <a:r>
-              <a:t>CalConnect proposal to ISO/TC 154  ·  CC/ISO 36010  ·  4</a:t>
+              <a:t>CalConnect → ISO/TC 154 · CC/ISO 36010 · 4</a:t>
             </a:r>
           </a:p>
         </p:txBody>
@@ -4898,7 +5040,7 @@
         <p:spPr>
           <a:xfrm>
             <a:off x="0" y="0"/>
-            <a:ext cx="12191695" cy="128016"/>
+            <a:ext cx="12191695" cy="109728"/>
           </a:xfrm>
           <a:prstGeom prst="rect">
             <a:avLst/>
@@ -4940,7 +5082,7 @@
         </p:nvSpPr>
         <p:spPr>
           <a:xfrm>
-            <a:off x="822960" y="502920"/>
+            <a:off x="822960" y="457200"/>
             <a:ext cx="10515600" cy="365760"/>
           </a:xfrm>
           <a:prstGeom prst="rect">
@@ -4955,7 +5097,7 @@
           <a:lstStyle/>
           <a:p>
             <a:pPr>
-              <a:defRPr sz="1300" b="0">
+              <a:defRPr sz="1400" b="0">
                 <a:solidFill>
                   <a:srgbClr val="2F6F82"/>
                 </a:solidFill>
@@ -4963,7 +5105,7 @@
               </a:defRPr>
             </a:pPr>
             <a:r>
-              <a:t>HARMONIZED MODELS</a:t>
+              <a:t>THE ANSWER</a:t>
             </a:r>
           </a:p>
         </p:txBody>
@@ -4976,8 +5118,8 @@
         </p:nvSpPr>
         <p:spPr>
           <a:xfrm>
-            <a:off x="822960" y="868680"/>
-            <a:ext cx="10515600" cy="1005840"/>
+            <a:off x="822960" y="841248"/>
+            <a:ext cx="10515600" cy="960120"/>
           </a:xfrm>
           <a:prstGeom prst="rect">
             <a:avLst/>
@@ -4991,28 +5133,52 @@
           <a:lstStyle/>
           <a:p>
             <a:pPr>
-              <a:defRPr sz="4000" b="1">
+              <a:defRPr sz="3400" b="1">
                 <a:solidFill>
                   <a:srgbClr val="0A1628"/>
                 </a:solidFill>
               </a:defRPr>
             </a:pPr>
             <a:r>
-              <a:t>One model, many markups (Annex A)</a:t>
-            </a:r>
-          </a:p>
-        </p:txBody>
-      </p:sp>
-      <p:sp>
-        <p:nvSpPr>
-          <p:cNvPr id="5" name="TextBox 4"/>
+              <a:t>One small model, deliberately lightweight</a:t>
+            </a:r>
+          </a:p>
+        </p:txBody>
+      </p:sp>
+      <p:pic>
+        <p:nvPicPr>
+          <p:cNvPr id="5" name="Picture 4" descr="d4-tiers.png"/>
+          <p:cNvPicPr>
+            <a:picLocks noChangeAspect="1"/>
+          </p:cNvPicPr>
+          <p:nvPr/>
+        </p:nvPicPr>
+        <p:blipFill>
+          <a:blip r:embed="rId2"/>
+          <a:stretch>
+            <a:fillRect/>
+          </a:stretch>
+        </p:blipFill>
+        <p:spPr>
+          <a:xfrm>
+            <a:off x="1938185" y="1554480"/>
+            <a:ext cx="8315324" cy="4434840"/>
+          </a:xfrm>
+          <a:prstGeom prst="rect">
+            <a:avLst/>
+          </a:prstGeom>
+        </p:spPr>
+      </p:pic>
+      <p:sp>
+        <p:nvSpPr>
+          <p:cNvPr id="6" name="TextBox 5"/>
           <p:cNvSpPr txBox="1"/>
           <p:nvPr/>
         </p:nvSpPr>
         <p:spPr>
           <a:xfrm>
-            <a:off x="822960" y="1691640"/>
-            <a:ext cx="10515600" cy="457200"/>
+            <a:off x="822960" y="6446520"/>
+            <a:ext cx="10515600" cy="320040"/>
           </a:xfrm>
           <a:prstGeom prst="rect">
             <a:avLst/>
@@ -5026,457 +5192,6 @@
           <a:lstStyle/>
           <a:p>
             <a:pPr>
-              <a:defRPr sz="1500" b="0">
-                <a:solidFill>
-                  <a:srgbClr val="243647"/>
-                </a:solidFill>
-              </a:defRPr>
-            </a:pPr>
-            <a:r>
-              <a:t>Construct-by-construct mapping tables, normative:</a:t>
-            </a:r>
-          </a:p>
-        </p:txBody>
-      </p:sp>
-      <p:sp>
-        <p:nvSpPr>
-          <p:cNvPr id="6" name="TextBox 5"/>
-          <p:cNvSpPr txBox="1"/>
-          <p:nvPr/>
-        </p:nvSpPr>
-        <p:spPr>
-          <a:xfrm>
-            <a:off x="822960" y="2240280"/>
-            <a:ext cx="3383280" cy="457200"/>
-          </a:xfrm>
-          <a:prstGeom prst="rect">
-            <a:avLst/>
-          </a:prstGeom>
-          <a:noFill/>
-        </p:spPr>
-        <p:txBody>
-          <a:bodyPr wrap="square">
-            <a:spAutoFit/>
-          </a:bodyPr>
-          <a:lstStyle/>
-          <a:p>
-            <a:pPr>
-              <a:defRPr sz="1600" b="1">
-                <a:solidFill>
-                  <a:srgbClr val="2F6F82"/>
-                </a:solidFill>
-              </a:defRPr>
-            </a:pPr>
-            <a:r>
-              <a:t>AsciiDoc</a:t>
-            </a:r>
-          </a:p>
-        </p:txBody>
-      </p:sp>
-      <p:sp>
-        <p:nvSpPr>
-          <p:cNvPr id="7" name="TextBox 6"/>
-          <p:cNvSpPr txBox="1"/>
-          <p:nvPr/>
-        </p:nvSpPr>
-        <p:spPr>
-          <a:xfrm>
-            <a:off x="822960" y="2743200"/>
-            <a:ext cx="3383280" cy="2377440"/>
-          </a:xfrm>
-          <a:prstGeom prst="rect">
-            <a:avLst/>
-          </a:prstGeom>
-          <a:noFill/>
-        </p:spPr>
-        <p:txBody>
-          <a:bodyPr wrap="square">
-            <a:spAutoFit/>
-          </a:bodyPr>
-          <a:lstStyle/>
-          <a:p>
-            <a:pPr>
-              <a:defRPr sz="1250" b="0">
-                <a:solidFill>
-                  <a:srgbClr val="243647"/>
-                </a:solidFill>
-                <a:latin typeface="Courier New"/>
-              </a:defRPr>
-            </a:pPr>
-            <a:r>
-              <a:t>header → bibdata + register</a:t>
-            </a:r>
-          </a:p>
-          <a:p>
-            <a:pPr>
-              <a:defRPr sz="1250" b="0">
-                <a:solidFill>
-                  <a:srgbClr val="243647"/>
-                </a:solidFill>
-                <a:latin typeface="Courier New"/>
-              </a:defRPr>
-            </a:pPr>
-            <a:r>
-              <a:t>admonitions → AdmonitionBlock + type</a:t>
-            </a:r>
-          </a:p>
-          <a:p>
-            <a:pPr>
-              <a:defRPr sz="1250" b="0">
-                <a:solidFill>
-                  <a:srgbClr val="243647"/>
-                </a:solidFill>
-                <a:latin typeface="Courier New"/>
-              </a:defRPr>
-            </a:pPr>
-            <a:r>
-              <a:t>lists (continuations) → relaxed ListItem</a:t>
-            </a:r>
-          </a:p>
-          <a:p>
-            <a:pPr>
-              <a:defRPr sz="1250" b="0">
-                <a:solidFill>
-                  <a:srgbClr val="243647"/>
-                </a:solidFill>
-                <a:latin typeface="Courier New"/>
-              </a:defRPr>
-            </a:pPr>
-            <a:r>
-              <a:t>passthroughs → FormattedString</a:t>
-            </a:r>
-          </a:p>
-          <a:p>
-            <a:pPr>
-              <a:defRPr sz="1250" b="0">
-                <a:solidFill>
-                  <a:srgbClr val="243647"/>
-                </a:solidFill>
-                <a:latin typeface="Courier New"/>
-              </a:defRPr>
-            </a:pPr>
-            <a:r>
-              <a:t>{attr} → ReferenceToVariable</a:t>
-            </a:r>
-          </a:p>
-        </p:txBody>
-      </p:sp>
-      <p:sp>
-        <p:nvSpPr>
-          <p:cNvPr id="8" name="TextBox 7"/>
-          <p:cNvSpPr txBox="1"/>
-          <p:nvPr/>
-        </p:nvSpPr>
-        <p:spPr>
-          <a:xfrm>
-            <a:off x="4434840" y="2240280"/>
-            <a:ext cx="3383280" cy="457200"/>
-          </a:xfrm>
-          <a:prstGeom prst="rect">
-            <a:avLst/>
-          </a:prstGeom>
-          <a:noFill/>
-        </p:spPr>
-        <p:txBody>
-          <a:bodyPr wrap="square">
-            <a:spAutoFit/>
-          </a:bodyPr>
-          <a:lstStyle/>
-          <a:p>
-            <a:pPr>
-              <a:defRPr sz="1600" b="1">
-                <a:solidFill>
-                  <a:srgbClr val="2F6F82"/>
-                </a:solidFill>
-              </a:defRPr>
-            </a:pPr>
-            <a:r>
-              <a:t>Markdown / GFM / Pandoc</a:t>
-            </a:r>
-          </a:p>
-        </p:txBody>
-      </p:sp>
-      <p:sp>
-        <p:nvSpPr>
-          <p:cNvPr id="9" name="TextBox 8"/>
-          <p:cNvSpPr txBox="1"/>
-          <p:nvPr/>
-        </p:nvSpPr>
-        <p:spPr>
-          <a:xfrm>
-            <a:off x="4434840" y="2743200"/>
-            <a:ext cx="3383280" cy="2377440"/>
-          </a:xfrm>
-          <a:prstGeom prst="rect">
-            <a:avLst/>
-          </a:prstGeom>
-          <a:noFill/>
-        </p:spPr>
-        <p:txBody>
-          <a:bodyPr wrap="square">
-            <a:spAutoFit/>
-          </a:bodyPr>
-          <a:lstStyle/>
-          <a:p>
-            <a:pPr>
-              <a:defRPr sz="1250" b="0">
-                <a:solidFill>
-                  <a:srgbClr val="243647"/>
-                </a:solidFill>
-                <a:latin typeface="Courier New"/>
-              </a:defRPr>
-            </a:pPr>
-            <a:r>
-              <a:t>GFM tables → TableBlock</a:t>
-            </a:r>
-          </a:p>
-          <a:p>
-            <a:pPr>
-              <a:defRPr sz="1250" b="0">
-                <a:solidFill>
-                  <a:srgbClr val="243647"/>
-                </a:solidFill>
-                <a:latin typeface="Courier New"/>
-              </a:defRPr>
-            </a:pPr>
-            <a:r>
-              <a:t>{#id .class} → attribute register</a:t>
-            </a:r>
-          </a:p>
-          <a:p>
-            <a:pPr>
-              <a:defRPr sz="1250" b="0">
-                <a:solidFill>
-                  <a:srgbClr val="243647"/>
-                </a:solidFill>
-                <a:latin typeface="Courier New"/>
-              </a:defRPr>
-            </a:pPr>
-            <a:r>
-              <a:t>::: divs → register + any container</a:t>
-            </a:r>
-          </a:p>
-          <a:p>
-            <a:pPr>
-              <a:defRPr sz="1250" b="0">
-                <a:solidFill>
-                  <a:srgbClr val="243647"/>
-                </a:solidFill>
-                <a:latin typeface="Courier New"/>
-              </a:defRPr>
-            </a:pPr>
-            <a:r>
-              <a:t>$math$ → StemElement (LaTeX)</a:t>
-            </a:r>
-          </a:p>
-          <a:p>
-            <a:pPr>
-              <a:defRPr sz="1250" b="0">
-                <a:solidFill>
-                  <a:srgbClr val="243647"/>
-                </a:solidFill>
-                <a:latin typeface="Courier New"/>
-              </a:defRPr>
-            </a:pPr>
-            <a:r>
-              <a:t>raw HTML → FormattedString + format</a:t>
-            </a:r>
-          </a:p>
-        </p:txBody>
-      </p:sp>
-      <p:sp>
-        <p:nvSpPr>
-          <p:cNvPr id="10" name="TextBox 9"/>
-          <p:cNvSpPr txBox="1"/>
-          <p:nvPr/>
-        </p:nvSpPr>
-        <p:spPr>
-          <a:xfrm>
-            <a:off x="8046720" y="2240280"/>
-            <a:ext cx="3383280" cy="457200"/>
-          </a:xfrm>
-          <a:prstGeom prst="rect">
-            <a:avLst/>
-          </a:prstGeom>
-          <a:noFill/>
-        </p:spPr>
-        <p:txBody>
-          <a:bodyPr wrap="square">
-            <a:spAutoFit/>
-          </a:bodyPr>
-          <a:lstStyle/>
-          <a:p>
-            <a:pPr>
-              <a:defRPr sz="1600" b="1">
-                <a:solidFill>
-                  <a:srgbClr val="2F6F82"/>
-                </a:solidFill>
-              </a:defRPr>
-            </a:pPr>
-            <a:r>
-              <a:t>reStructuredText</a:t>
-            </a:r>
-          </a:p>
-        </p:txBody>
-      </p:sp>
-      <p:sp>
-        <p:nvSpPr>
-          <p:cNvPr id="11" name="TextBox 10"/>
-          <p:cNvSpPr txBox="1"/>
-          <p:nvPr/>
-        </p:nvSpPr>
-        <p:spPr>
-          <a:xfrm>
-            <a:off x="8046720" y="2743200"/>
-            <a:ext cx="3383280" cy="2377440"/>
-          </a:xfrm>
-          <a:prstGeom prst="rect">
-            <a:avLst/>
-          </a:prstGeom>
-          <a:noFill/>
-        </p:spPr>
-        <p:txBody>
-          <a:bodyPr wrap="square">
-            <a:spAutoFit/>
-          </a:bodyPr>
-          <a:lstStyle/>
-          <a:p>
-            <a:pPr>
-              <a:defRPr sz="1250" b="0">
-                <a:solidFill>
-                  <a:srgbClr val="243647"/>
-                </a:solidFill>
-                <a:latin typeface="Courier New"/>
-              </a:defRPr>
-            </a:pPr>
-            <a:r>
-              <a:t>directives → register + relaxed content</a:t>
-            </a:r>
-          </a:p>
-          <a:p>
-            <a:pPr>
-              <a:defRPr sz="1250" b="0">
-                <a:solidFill>
-                  <a:srgbClr val="243647"/>
-                </a:solidFill>
-                <a:latin typeface="Courier New"/>
-              </a:defRPr>
-            </a:pPr>
-            <a:r>
-              <a:t>|substitution| → ReferenceToVariable</a:t>
-            </a:r>
-          </a:p>
-          <a:p>
-            <a:pPr>
-              <a:defRPr sz="1250" b="0">
-                <a:solidFill>
-                  <a:srgbClr val="243647"/>
-                </a:solidFill>
-                <a:latin typeface="Courier New"/>
-              </a:defRPr>
-            </a:pPr>
-            <a:r>
-              <a:t>roles → text-element specializations</a:t>
-            </a:r>
-          </a:p>
-          <a:p>
-            <a:pPr>
-              <a:defRPr sz="1250" b="0">
-                <a:solidFill>
-                  <a:srgbClr val="243647"/>
-                </a:solidFill>
-                <a:latin typeface="Courier New"/>
-              </a:defRPr>
-            </a:pPr>
-            <a:r>
-              <a:t>field lists → document register</a:t>
-            </a:r>
-          </a:p>
-          <a:p>
-            <a:pPr>
-              <a:defRPr sz="1250" b="0">
-                <a:solidFill>
-                  <a:srgbClr val="243647"/>
-                </a:solidFill>
-                <a:latin typeface="Courier New"/>
-              </a:defRPr>
-            </a:pPr>
-            <a:r>
-              <a:t>admonitions → type specializations</a:t>
-            </a:r>
-          </a:p>
-        </p:txBody>
-      </p:sp>
-      <p:sp>
-        <p:nvSpPr>
-          <p:cNvPr id="12" name="TextBox 11"/>
-          <p:cNvSpPr txBox="1"/>
-          <p:nvPr/>
-        </p:nvSpPr>
-        <p:spPr>
-          <a:xfrm>
-            <a:off x="822960" y="5623560"/>
-            <a:ext cx="10515600" cy="548640"/>
-          </a:xfrm>
-          <a:prstGeom prst="rect">
-            <a:avLst/>
-          </a:prstGeom>
-          <a:noFill/>
-        </p:spPr>
-        <p:txBody>
-          <a:bodyPr wrap="square">
-            <a:spAutoFit/>
-          </a:bodyPr>
-          <a:lstStyle/>
-          <a:p>
-            <a:pPr>
-              <a:defRPr sz="1400" b="1">
-                <a:solidFill>
-                  <a:srgbClr val="B85A2A"/>
-                </a:solidFill>
-              </a:defRPr>
-            </a:pPr>
-            <a:r>
-              <a:t>Unlisted constructs are covered by the conformance formula:</a:t>
-            </a:r>
-          </a:p>
-          <a:p>
-            <a:pPr>
-              <a:defRPr sz="1400" b="1">
-                <a:solidFill>
-                  <a:srgbClr val="B85A2A"/>
-                </a:solidFill>
-              </a:defRPr>
-            </a:pPr>
-            <a:r>
-              <a:t>construct · type-specialization · register + relaxed or opaque content</a:t>
-            </a:r>
-          </a:p>
-        </p:txBody>
-      </p:sp>
-      <p:sp>
-        <p:nvSpPr>
-          <p:cNvPr id="13" name="TextBox 12"/>
-          <p:cNvSpPr txBox="1"/>
-          <p:nvPr/>
-        </p:nvSpPr>
-        <p:spPr>
-          <a:xfrm>
-            <a:off x="822960" y="6400800"/>
-            <a:ext cx="10515600" cy="365760"/>
-          </a:xfrm>
-          <a:prstGeom prst="rect">
-            <a:avLst/>
-          </a:prstGeom>
-          <a:noFill/>
-        </p:spPr>
-        <p:txBody>
-          <a:bodyPr wrap="square">
-            <a:spAutoFit/>
-          </a:bodyPr>
-          <a:lstStyle/>
-          <a:p>
-            <a:pPr>
               <a:defRPr sz="1000" b="0">
                 <a:solidFill>
                   <a:srgbClr val="8A9AAB"/>
@@ -5484,7 +5199,7 @@
               </a:defRPr>
             </a:pPr>
             <a:r>
-              <a:t>CalConnect proposal to ISO/TC 154  ·  CC/ISO 36010  ·  5</a:t>
+              <a:t>CalConnect → ISO/TC 154 · CC/ISO 36010 · 5</a:t>
             </a:r>
           </a:p>
         </p:txBody>
@@ -5524,7 +5239,7 @@
         <p:spPr>
           <a:xfrm>
             <a:off x="0" y="0"/>
-            <a:ext cx="12191695" cy="128016"/>
+            <a:ext cx="12191695" cy="109728"/>
           </a:xfrm>
           <a:prstGeom prst="rect">
             <a:avLst/>
@@ -5566,7 +5281,7 @@
         </p:nvSpPr>
         <p:spPr>
           <a:xfrm>
-            <a:off x="822960" y="502920"/>
+            <a:off x="822960" y="457200"/>
             <a:ext cx="10515600" cy="365760"/>
           </a:xfrm>
           <a:prstGeom prst="rect">
@@ -5581,7 +5296,7 @@
           <a:lstStyle/>
           <a:p>
             <a:pPr>
-              <a:defRPr sz="1300" b="0">
+              <a:defRPr sz="1400" b="0">
                 <a:solidFill>
                   <a:srgbClr val="2F6F82"/>
                 </a:solidFill>
@@ -5589,7 +5304,7 @@
               </a:defRPr>
             </a:pPr>
             <a:r>
-              <a:t>SPECIALIZATION &amp; EXTENSION</a:t>
+              <a:t>WHY TC 154 — AND NOT ANOTHER TC?</a:t>
             </a:r>
           </a:p>
         </p:txBody>
@@ -5602,8 +5317,8 @@
         </p:nvSpPr>
         <p:spPr>
           <a:xfrm>
-            <a:off x="822960" y="868680"/>
-            <a:ext cx="10515600" cy="1005840"/>
+            <a:off x="822960" y="841248"/>
+            <a:ext cx="10515600" cy="960120"/>
           </a:xfrm>
           <a:prstGeom prst="rect">
             <a:avLst/>
@@ -5617,28 +5332,52 @@
           <a:lstStyle/>
           <a:p>
             <a:pPr>
-              <a:defRPr sz="4000" b="1">
+              <a:defRPr sz="3400" b="1">
                 <a:solidFill>
                   <a:srgbClr val="0A1628"/>
                 </a:solidFill>
               </a:defRPr>
             </a:pPr>
             <a:r>
-              <a:t>Accommodate dialects without forking the model</a:t>
-            </a:r>
-          </a:p>
-        </p:txBody>
-      </p:sp>
-      <p:sp>
-        <p:nvSpPr>
-          <p:cNvPr id="5" name="TextBox 4"/>
+              <a:t>Because TC 154 is where documents are data</a:t>
+            </a:r>
+          </a:p>
+        </p:txBody>
+      </p:sp>
+      <p:pic>
+        <p:nvPicPr>
+          <p:cNvPr id="5" name="Picture 4" descr="d5-tc154.png"/>
+          <p:cNvPicPr>
+            <a:picLocks noChangeAspect="1"/>
+          </p:cNvPicPr>
+          <p:nvPr/>
+        </p:nvPicPr>
+        <p:blipFill>
+          <a:blip r:embed="rId2"/>
+          <a:stretch>
+            <a:fillRect/>
+          </a:stretch>
+        </p:blipFill>
+        <p:spPr>
+          <a:xfrm>
+            <a:off x="1895322" y="1508760"/>
+            <a:ext cx="8401050" cy="4480560"/>
+          </a:xfrm>
+          <a:prstGeom prst="rect">
+            <a:avLst/>
+          </a:prstGeom>
+        </p:spPr>
+      </p:pic>
+      <p:sp>
+        <p:nvSpPr>
+          <p:cNvPr id="6" name="TextBox 5"/>
           <p:cNvSpPr txBox="1"/>
           <p:nvPr/>
         </p:nvSpPr>
         <p:spPr>
           <a:xfrm>
-            <a:off x="822960" y="1737360"/>
-            <a:ext cx="5120640" cy="365760"/>
+            <a:off x="822960" y="6446520"/>
+            <a:ext cx="10515600" cy="320040"/>
           </a:xfrm>
           <a:prstGeom prst="rect">
             <a:avLst/>
@@ -5652,339 +5391,6 @@
           <a:lstStyle/>
           <a:p>
             <a:pPr>
-              <a:defRPr sz="1500" b="1">
-                <a:solidFill>
-                  <a:srgbClr val="2F6F82"/>
-                </a:solidFill>
-                <a:latin typeface="Courier New"/>
-              </a:defRPr>
-            </a:pPr>
-            <a:r>
-              <a:t>SPECIALIZE (Annex B)</a:t>
-            </a:r>
-          </a:p>
-        </p:txBody>
-      </p:sp>
-      <p:sp>
-        <p:nvSpPr>
-          <p:cNvPr id="6" name="TextBox 5"/>
-          <p:cNvSpPr txBox="1"/>
-          <p:nvPr/>
-        </p:nvSpPr>
-        <p:spPr>
-          <a:xfrm>
-            <a:off x="822960" y="2194560"/>
-            <a:ext cx="5120640" cy="3108960"/>
-          </a:xfrm>
-          <a:prstGeom prst="rect">
-            <a:avLst/>
-          </a:prstGeom>
-          <a:noFill/>
-        </p:spPr>
-        <p:txBody>
-          <a:bodyPr wrap="square">
-            <a:spAutoFit/>
-          </a:bodyPr>
-          <a:lstStyle/>
-          <a:p>
-            <a:pPr>
-              <a:defRPr sz="1400" b="0">
-                <a:solidFill>
-                  <a:srgbClr val="243647"/>
-                </a:solidFill>
-              </a:defRPr>
-            </a:pPr>
-            <a:r>
-              <a:t>· Type values: admonition kinds, list numeration,</a:t>
-            </a:r>
-          </a:p>
-          <a:p>
-            <a:pPr>
-              <a:defRPr sz="1400" b="0">
-                <a:solidFill>
-                  <a:srgbClr val="243647"/>
-                </a:solidFill>
-              </a:defRPr>
-            </a:pPr>
-            <a:r>
-              <a:t>  stem languages, document classes</a:t>
-            </a:r>
-          </a:p>
-          <a:p>
-            <a:pPr>
-              <a:defRPr sz="1400" b="0">
-                <a:solidFill>
-                  <a:srgbClr val="243647"/>
-                </a:solidFill>
-              </a:defRPr>
-            </a:pPr>
-            <a:r>
-              <a:t>· Attribute overrides: add, remove, retighten</a:t>
-            </a:r>
-          </a:p>
-          <a:p>
-            <a:pPr>
-              <a:defRPr sz="1400" b="0">
-                <a:solidFill>
-                  <a:srgbClr val="243647"/>
-                </a:solidFill>
-              </a:defRPr>
-            </a:pPr>
-            <a:r>
-              <a:t>  (e.g. proscribing hanging paragraphs)</a:t>
-            </a:r>
-          </a:p>
-          <a:p>
-            <a:pPr>
-              <a:defRPr sz="1400" b="0">
-                <a:solidFill>
-                  <a:srgbClr val="243647"/>
-                </a:solidFill>
-              </a:defRPr>
-            </a:pPr>
-            <a:r>
-              <a:t>· Class subclassing under the construct roots</a:t>
-            </a:r>
-          </a:p>
-          <a:p>
-            <a:pPr>
-              <a:defRPr sz="1400" b="0">
-                <a:solidFill>
-                  <a:srgbClr val="243647"/>
-                </a:solidFill>
-              </a:defRPr>
-            </a:pPr>
-            <a:r>
-              <a:t>· Constraint specialization: PureTextElement</a:t>
-            </a:r>
-          </a:p>
-          <a:p>
-            <a:pPr>
-              <a:defRPr sz="1400" b="0">
-                <a:solidFill>
-                  <a:srgbClr val="243647"/>
-                </a:solidFill>
-              </a:defRPr>
-            </a:pPr>
-            <a:r>
-              <a:t>  recursion guarantees</a:t>
-            </a:r>
-          </a:p>
-        </p:txBody>
-      </p:sp>
-      <p:sp>
-        <p:nvSpPr>
-          <p:cNvPr id="7" name="TextBox 6"/>
-          <p:cNvSpPr txBox="1"/>
-          <p:nvPr/>
-        </p:nvSpPr>
-        <p:spPr>
-          <a:xfrm>
-            <a:off x="6400800" y="1737360"/>
-            <a:ext cx="4937760" cy="365760"/>
-          </a:xfrm>
-          <a:prstGeom prst="rect">
-            <a:avLst/>
-          </a:prstGeom>
-          <a:noFill/>
-        </p:spPr>
-        <p:txBody>
-          <a:bodyPr wrap="square">
-            <a:spAutoFit/>
-          </a:bodyPr>
-          <a:lstStyle/>
-          <a:p>
-            <a:pPr>
-              <a:defRPr sz="1500" b="1">
-                <a:solidFill>
-                  <a:srgbClr val="B85A2A"/>
-                </a:solidFill>
-                <a:latin typeface="Courier New"/>
-              </a:defRPr>
-            </a:pPr>
-            <a:r>
-              <a:t>EXTEND (Annex C)</a:t>
-            </a:r>
-          </a:p>
-        </p:txBody>
-      </p:sp>
-      <p:sp>
-        <p:nvSpPr>
-          <p:cNvPr id="8" name="TextBox 7"/>
-          <p:cNvSpPr txBox="1"/>
-          <p:nvPr/>
-        </p:nvSpPr>
-        <p:spPr>
-          <a:xfrm>
-            <a:off x="6400800" y="2194560"/>
-            <a:ext cx="4937760" cy="3108960"/>
-          </a:xfrm>
-          <a:prstGeom prst="rect">
-            <a:avLst/>
-          </a:prstGeom>
-          <a:noFill/>
-        </p:spPr>
-        <p:txBody>
-          <a:bodyPr wrap="square">
-            <a:spAutoFit/>
-          </a:bodyPr>
-          <a:lstStyle/>
-          <a:p>
-            <a:pPr>
-              <a:defRPr sz="1400" b="0">
-                <a:solidFill>
-                  <a:srgbClr val="243647"/>
-                </a:solidFill>
-              </a:defRPr>
-            </a:pPr>
-            <a:r>
-              <a:t>· Attribute register: open key-value entries on any</a:t>
-            </a:r>
-          </a:p>
-          <a:p>
-            <a:pPr>
-              <a:defRPr sz="1400" b="0">
-                <a:solidFill>
-                  <a:srgbClr val="243647"/>
-                </a:solidFill>
-              </a:defRPr>
-            </a:pPr>
-            <a:r>
-              <a:t>  construct; well-known keys (id, class, lang,</a:t>
-            </a:r>
-          </a:p>
-          <a:p>
-            <a:pPr>
-              <a:defRPr sz="1400" b="0">
-                <a:solidFill>
-                  <a:srgbClr val="243647"/>
-                </a:solidFill>
-              </a:defRPr>
-            </a:pPr>
-            <a:r>
-              <a:t>  unnumbered, format…), dialect-bound keys</a:t>
-            </a:r>
-          </a:p>
-          <a:p>
-            <a:pPr>
-              <a:defRPr sz="1400" b="0">
-                <a:solidFill>
-                  <a:srgbClr val="243647"/>
-                </a:solidFill>
-              </a:defRPr>
-            </a:pPr>
-            <a:r>
-              <a:t>· Raw content: FormattedString / format-qualified —</a:t>
-            </a:r>
-          </a:p>
-          <a:p>
-            <a:pPr>
-              <a:defRPr sz="1400" b="0">
-                <a:solidFill>
-                  <a:srgbClr val="243647"/>
-                </a:solidFill>
-              </a:defRPr>
-            </a:pPr>
-            <a:r>
-              <a:t>  the unknown stays lossless</a:t>
-            </a:r>
-          </a:p>
-          <a:p>
-            <a:pPr>
-              <a:defRPr sz="1400" b="0">
-                <a:solidFill>
-                  <a:srgbClr val="243647"/>
-                </a:solidFill>
-              </a:defRPr>
-            </a:pPr>
-            <a:r>
-              <a:t>· Unknown directives decompose into register +</a:t>
-            </a:r>
-          </a:p>
-          <a:p>
-            <a:pPr>
-              <a:defRPr sz="1400" b="0">
-                <a:solidFill>
-                  <a:srgbClr val="243647"/>
-                </a:solidFill>
-              </a:defRPr>
-            </a:pPr>
-            <a:r>
-              <a:t>  relaxed content (the entire Sphinx ecosystem)</a:t>
-            </a:r>
-          </a:p>
-          <a:p>
-            <a:pPr>
-              <a:defRPr sz="1400" b="0">
-                <a:solidFill>
-                  <a:srgbClr val="243647"/>
-                </a:solidFill>
-              </a:defRPr>
-            </a:pPr>
-            <a:r>
-              <a:t>· A document is a block: whole documents compose</a:t>
-            </a:r>
-          </a:p>
-        </p:txBody>
-      </p:sp>
-      <p:sp>
-        <p:nvSpPr>
-          <p:cNvPr id="9" name="TextBox 8"/>
-          <p:cNvSpPr txBox="1"/>
-          <p:nvPr/>
-        </p:nvSpPr>
-        <p:spPr>
-          <a:xfrm>
-            <a:off x="822960" y="5669280"/>
-            <a:ext cx="10515600" cy="457200"/>
-          </a:xfrm>
-          <a:prstGeom prst="rect">
-            <a:avLst/>
-          </a:prstGeom>
-          <a:noFill/>
-        </p:spPr>
-        <p:txBody>
-          <a:bodyPr wrap="square">
-            <a:spAutoFit/>
-          </a:bodyPr>
-          <a:lstStyle/>
-          <a:p>
-            <a:pPr>
-              <a:defRPr sz="1400" b="1">
-                <a:solidFill>
-                  <a:srgbClr val="B85A2A"/>
-                </a:solidFill>
-              </a:defRPr>
-            </a:pPr>
-            <a:r>
-              <a:t>OCP by construction: the basis is defined once; specialization and extension never modify it.</a:t>
-            </a:r>
-          </a:p>
-        </p:txBody>
-      </p:sp>
-      <p:sp>
-        <p:nvSpPr>
-          <p:cNvPr id="10" name="TextBox 9"/>
-          <p:cNvSpPr txBox="1"/>
-          <p:nvPr/>
-        </p:nvSpPr>
-        <p:spPr>
-          <a:xfrm>
-            <a:off x="822960" y="6400800"/>
-            <a:ext cx="10515600" cy="365760"/>
-          </a:xfrm>
-          <a:prstGeom prst="rect">
-            <a:avLst/>
-          </a:prstGeom>
-          <a:noFill/>
-        </p:spPr>
-        <p:txBody>
-          <a:bodyPr wrap="square">
-            <a:spAutoFit/>
-          </a:bodyPr>
-          <a:lstStyle/>
-          <a:p>
-            <a:pPr>
               <a:defRPr sz="1000" b="0">
                 <a:solidFill>
                   <a:srgbClr val="8A9AAB"/>
@@ -5992,7 +5398,7 @@
               </a:defRPr>
             </a:pPr>
             <a:r>
-              <a:t>CalConnect proposal to ISO/TC 154  ·  CC/ISO 36010  ·  6</a:t>
+              <a:t>CalConnect → ISO/TC 154 · CC/ISO 36010 · 6</a:t>
             </a:r>
           </a:p>
         </p:txBody>
@@ -6032,7 +5438,7 @@
         <p:spPr>
           <a:xfrm>
             <a:off x="0" y="0"/>
-            <a:ext cx="12191695" cy="128016"/>
+            <a:ext cx="12191695" cy="109728"/>
           </a:xfrm>
           <a:prstGeom prst="rect">
             <a:avLst/>
@@ -6074,7 +5480,7 @@
         </p:nvSpPr>
         <p:spPr>
           <a:xfrm>
-            <a:off x="822960" y="502920"/>
+            <a:off x="822960" y="457200"/>
             <a:ext cx="10515600" cy="365760"/>
           </a:xfrm>
           <a:prstGeom prst="rect">
@@ -6089,7 +5495,7 @@
           <a:lstStyle/>
           <a:p>
             <a:pPr>
-              <a:defRPr sz="1300" b="0">
+              <a:defRPr sz="1400" b="0">
                 <a:solidFill>
                   <a:srgbClr val="2F6F82"/>
                 </a:solidFill>
@@ -6097,7 +5503,7 @@
               </a:defRPr>
             </a:pPr>
             <a:r>
-              <a:t>READINESS</a:t>
+              <a:t>WHY HAS THIS NOT EXISTED UNTIL NOW?</a:t>
             </a:r>
           </a:p>
         </p:txBody>
@@ -6110,8 +5516,8 @@
         </p:nvSpPr>
         <p:spPr>
           <a:xfrm>
-            <a:off x="822960" y="868680"/>
-            <a:ext cx="10515600" cy="1005840"/>
+            <a:off x="822960" y="841248"/>
+            <a:ext cx="10515600" cy="960120"/>
           </a:xfrm>
           <a:prstGeom prst="rect">
             <a:avLst/>
@@ -6125,14 +5531,14 @@
           <a:lstStyle/>
           <a:p>
             <a:pPr>
-              <a:defRPr sz="4000" b="1">
+              <a:defRPr sz="3400" b="1">
                 <a:solidFill>
                   <a:srgbClr val="0A1628"/>
                 </a:solidFill>
               </a:defRPr>
             </a:pPr>
             <a:r>
-              <a:t>Built to be a standard</a:t>
+              <a:t>Syntaxes competed; consortia standardized the pieces</a:t>
             </a:r>
           </a:p>
         </p:txBody>
@@ -6146,7 +5552,7 @@
         <p:spPr>
           <a:xfrm>
             <a:off x="822960" y="1783080"/>
-            <a:ext cx="3017520" cy="457200"/>
+            <a:ext cx="4206240" cy="822960"/>
           </a:xfrm>
           <a:prstGeom prst="rect">
             <a:avLst/>
@@ -6160,14 +5566,14 @@
           <a:lstStyle/>
           <a:p>
             <a:pPr>
-              <a:defRPr sz="1500" b="1">
-                <a:solidFill>
-                  <a:srgbClr val="2F6F82"/>
-                </a:solidFill>
-              </a:defRPr>
-            </a:pPr>
-            <a:r>
-              <a:t>Complete base text</a:t>
+              <a:defRPr sz="1550" b="1">
+                <a:solidFill>
+                  <a:srgbClr val="B85A2A"/>
+                </a:solidFill>
+              </a:defRPr>
+            </a:pPr>
+            <a:r>
+              <a:t>Standards bodies standardized elements, not documents</a:t>
             </a:r>
           </a:p>
         </p:txBody>
@@ -6180,8 +5586,8 @@
         </p:nvSpPr>
         <p:spPr>
           <a:xfrm>
-            <a:off x="4023360" y="1783080"/>
-            <a:ext cx="7406640" cy="914400"/>
+            <a:off x="5303520" y="1783080"/>
+            <a:ext cx="6035040" cy="1051560"/>
           </a:xfrm>
           <a:prstGeom prst="rect">
             <a:avLst/>
@@ -6202,7 +5608,7 @@
               </a:defRPr>
             </a:pPr>
             <a:r>
-              <a:t>CC/ISO 36010: model clauses, conformance clause with a testable formula, normative mapping annex, specialization and extension annexes, abstract test suite (Annex D)</a:t>
+              <a:t>ISO gave us time (8601), language (639), scripts (15924), references (690). The document carrying them was always someone’s tool, never a standard.</a:t>
             </a:r>
           </a:p>
         </p:txBody>
@@ -6215,8 +5621,8 @@
         </p:nvSpPr>
         <p:spPr>
           <a:xfrm>
-            <a:off x="822960" y="2679191"/>
-            <a:ext cx="3017520" cy="457200"/>
+            <a:off x="822960" y="2898648"/>
+            <a:ext cx="4206240" cy="822960"/>
           </a:xfrm>
           <a:prstGeom prst="rect">
             <a:avLst/>
@@ -6230,14 +5636,14 @@
           <a:lstStyle/>
           <a:p>
             <a:pPr>
-              <a:defRPr sz="1500" b="1">
-                <a:solidFill>
-                  <a:srgbClr val="2F6F82"/>
-                </a:solidFill>
-              </a:defRPr>
-            </a:pPr>
-            <a:r>
-              <a:t>Machine-checked</a:t>
+              <a:defRPr sz="1550" b="1">
+                <a:solidFill>
+                  <a:srgbClr val="B85A2A"/>
+                </a:solidFill>
+              </a:defRPr>
+            </a:pPr>
+            <a:r>
+              <a:t>Format wars had no neutral referee</a:t>
             </a:r>
           </a:p>
         </p:txBody>
@@ -6250,8 +5656,8 @@
         </p:nvSpPr>
         <p:spPr>
           <a:xfrm>
-            <a:off x="4023360" y="2679191"/>
-            <a:ext cx="7406640" cy="914400"/>
+            <a:off x="5303520" y="2898648"/>
+            <a:ext cx="6035040" cy="1051560"/>
           </a:xfrm>
           <a:prstGeom prst="rect">
             <a:avLst/>
@@ -6272,7 +5678,7 @@
               </a:defRPr>
             </a:pPr>
             <a:r>
-              <a:t>Every claim that can be executed is executed in CI: model lint, diagram parity, grammar compilation and regeneration parity, twin-instance validation</a:t>
+              <a:t>Markdown vs AsciiDoc vs RST is a tooling debate. A metamodel below all of them was in no vendor’s interest to build.</a:t>
             </a:r>
           </a:p>
         </p:txBody>
@@ -6285,8 +5691,8 @@
         </p:nvSpPr>
         <p:spPr>
           <a:xfrm>
-            <a:off x="822960" y="3575303"/>
-            <a:ext cx="3017520" cy="457200"/>
+            <a:off x="822960" y="4014215"/>
+            <a:ext cx="4206240" cy="822960"/>
           </a:xfrm>
           <a:prstGeom prst="rect">
             <a:avLst/>
@@ -6300,14 +5706,14 @@
           <a:lstStyle/>
           <a:p>
             <a:pPr>
-              <a:defRPr sz="1500" b="1">
-                <a:solidFill>
-                  <a:srgbClr val="2F6F82"/>
-                </a:solidFill>
-              </a:defRPr>
-            </a:pPr>
-            <a:r>
-              <a:t>Aligned ecosystem</a:t>
+              <a:defRPr sz="1550" b="1">
+                <a:solidFill>
+                  <a:srgbClr val="B85A2A"/>
+                </a:solidFill>
+              </a:defRPr>
+            </a:pPr>
+            <a:r>
+              <a:t>It took a standards producer to need it</a:t>
             </a:r>
           </a:p>
         </p:txBody>
@@ -6320,8 +5726,8 @@
         </p:nvSpPr>
         <p:spPr>
           <a:xfrm>
-            <a:off x="4023360" y="3575303"/>
-            <a:ext cx="7406640" cy="914400"/>
+            <a:off x="5303520" y="4014215"/>
+            <a:ext cx="6035040" cy="1051560"/>
           </a:xfrm>
           <a:prstGeom prst="rect">
             <a:avLst/>
@@ -6342,7 +5748,7 @@
               </a:defRPr>
             </a:pPr>
             <a:r>
-              <a:t>ISO 639 / 15924 / 3166 / 8601 code sets; ISO 24229 spelling systems and system codes; Relaton (ISO 690 lineage) for bibliography</a:t>
+              <a:t>CalConnect/Metanorma authors standards IN lightweight markup and renders to ISO-grade output — the exact round-trip everyone else gave up on. The model was extracted from production, not invented.</a:t>
             </a:r>
           </a:p>
         </p:txBody>
@@ -6355,8 +5761,8 @@
         </p:nvSpPr>
         <p:spPr>
           <a:xfrm>
-            <a:off x="822960" y="4471416"/>
-            <a:ext cx="3017520" cy="457200"/>
+            <a:off x="822960" y="5129783"/>
+            <a:ext cx="4206240" cy="822960"/>
           </a:xfrm>
           <a:prstGeom prst="rect">
             <a:avLst/>
@@ -6370,14 +5776,14 @@
           <a:lstStyle/>
           <a:p>
             <a:pPr>
-              <a:defRPr sz="1500" b="1">
-                <a:solidFill>
-                  <a:srgbClr val="2F6F82"/>
-                </a:solidFill>
-              </a:defRPr>
-            </a:pPr>
-            <a:r>
-              <a:t>Open governance artifacts</a:t>
+              <a:defRPr sz="1550" b="1">
+                <a:solidFill>
+                  <a:srgbClr val="B85A2A"/>
+                </a:solidFill>
+              </a:defRPr>
+            </a:pPr>
+            <a:r>
+              <a:t>Now that it is proven, it can be neutral</a:t>
             </a:r>
           </a:p>
         </p:txBody>
@@ -6390,8 +5796,8 @@
         </p:nvSpPr>
         <p:spPr>
           <a:xfrm>
-            <a:off x="4023360" y="4471416"/>
-            <a:ext cx="7406640" cy="914400"/>
+            <a:off x="5303520" y="5129783"/>
+            <a:ext cx="6035040" cy="1051560"/>
           </a:xfrm>
           <a:prstGeom prst="rect">
             <a:avLst/>
@@ -6412,7 +5818,7 @@
               </a:defRPr>
             </a:pPr>
             <a:r>
-              <a:t>Model sources, grammars, fixtures, atlas site, and CI are public: metanorma/basicdoc-models</a:t>
+              <a:t>Six years, 30+ document flavours, executable conformance — ready to hand to ISO as a public good.</a:t>
             </a:r>
           </a:p>
         </p:txBody>
@@ -6425,8 +5831,8 @@
         </p:nvSpPr>
         <p:spPr>
           <a:xfrm>
-            <a:off x="822960" y="5367527"/>
-            <a:ext cx="3017520" cy="457200"/>
+            <a:off x="822960" y="6446520"/>
+            <a:ext cx="10515600" cy="320040"/>
           </a:xfrm>
           <a:prstGeom prst="rect">
             <a:avLst/>
@@ -6440,76 +5846,6 @@
           <a:lstStyle/>
           <a:p>
             <a:pPr>
-              <a:defRPr sz="1500" b="1">
-                <a:solidFill>
-                  <a:srgbClr val="2F6F82"/>
-                </a:solidFill>
-              </a:defRPr>
-            </a:pPr>
-            <a:r>
-              <a:t>Existing consumers</a:t>
-            </a:r>
-          </a:p>
-        </p:txBody>
-      </p:sp>
-      <p:sp>
-        <p:nvSpPr>
-          <p:cNvPr id="14" name="TextBox 13"/>
-          <p:cNvSpPr txBox="1"/>
-          <p:nvPr/>
-        </p:nvSpPr>
-        <p:spPr>
-          <a:xfrm>
-            <a:off x="4023360" y="5367527"/>
-            <a:ext cx="7406640" cy="914400"/>
-          </a:xfrm>
-          <a:prstGeom prst="rect">
-            <a:avLst/>
-          </a:prstGeom>
-          <a:noFill/>
-        </p:spPr>
-        <p:txBody>
-          <a:bodyPr wrap="square">
-            <a:spAutoFit/>
-          </a:bodyPr>
-          <a:lstStyle/>
-          <a:p>
-            <a:pPr>
-              <a:defRPr sz="1300" b="0">
-                <a:solidFill>
-                  <a:srgbClr val="243647"/>
-                </a:solidFill>
-              </a:defRPr>
-            </a:pPr>
-            <a:r>
-              <a:t>relaton-models, standoc-models, Metanorma flavours — the model already moves real standards today</a:t>
-            </a:r>
-          </a:p>
-        </p:txBody>
-      </p:sp>
-      <p:sp>
-        <p:nvSpPr>
-          <p:cNvPr id="15" name="TextBox 14"/>
-          <p:cNvSpPr txBox="1"/>
-          <p:nvPr/>
-        </p:nvSpPr>
-        <p:spPr>
-          <a:xfrm>
-            <a:off x="822960" y="6400800"/>
-            <a:ext cx="10515600" cy="365760"/>
-          </a:xfrm>
-          <a:prstGeom prst="rect">
-            <a:avLst/>
-          </a:prstGeom>
-          <a:noFill/>
-        </p:spPr>
-        <p:txBody>
-          <a:bodyPr wrap="square">
-            <a:spAutoFit/>
-          </a:bodyPr>
-          <a:lstStyle/>
-          <a:p>
-            <a:pPr>
               <a:defRPr sz="1000" b="0">
                 <a:solidFill>
                   <a:srgbClr val="8A9AAB"/>
@@ -6517,7 +5853,7 @@
               </a:defRPr>
             </a:pPr>
             <a:r>
-              <a:t>CalConnect proposal to ISO/TC 154  ·  CC/ISO 36010  ·  7</a:t>
+              <a:t>CalConnect → ISO/TC 154 · CC/ISO 36010 · 7</a:t>
             </a:r>
           </a:p>
         </p:txBody>
@@ -6536,7 +5872,7 @@
     <p:bg>
       <p:bgPr>
         <a:solidFill>
-          <a:srgbClr val="0A1628"/>
+          <a:srgbClr val="FFFAF2"/>
         </a:solidFill>
         <a:effectLst/>
       </p:bgPr>
@@ -6557,7 +5893,7 @@
         <p:spPr>
           <a:xfrm>
             <a:off x="0" y="0"/>
-            <a:ext cx="12191695" cy="164592"/>
+            <a:ext cx="12191695" cy="109728"/>
           </a:xfrm>
           <a:prstGeom prst="rect">
             <a:avLst/>
@@ -6599,8 +5935,8 @@
         </p:nvSpPr>
         <p:spPr>
           <a:xfrm>
-            <a:off x="822960" y="1097280"/>
-            <a:ext cx="10515600" cy="457200"/>
+            <a:off x="822960" y="457200"/>
+            <a:ext cx="10515600" cy="365760"/>
           </a:xfrm>
           <a:prstGeom prst="rect">
             <a:avLst/>
@@ -6614,7 +5950,7 @@
           <a:lstStyle/>
           <a:p>
             <a:pPr>
-              <a:defRPr sz="1500" b="0">
+              <a:defRPr sz="1400" b="0">
                 <a:solidFill>
                   <a:srgbClr val="2F6F82"/>
                 </a:solidFill>
@@ -6622,7 +5958,7 @@
               </a:defRPr>
             </a:pPr>
             <a:r>
-              <a:t>THE ASK</a:t>
+              <a:t>HARMONIZED — ANNEX A, NORMATIVE</a:t>
             </a:r>
           </a:p>
         </p:txBody>
@@ -6635,8 +5971,8 @@
         </p:nvSpPr>
         <p:spPr>
           <a:xfrm>
-            <a:off x="822960" y="1600200"/>
-            <a:ext cx="10515600" cy="1463040"/>
+            <a:off x="822960" y="841248"/>
+            <a:ext cx="10515600" cy="960120"/>
           </a:xfrm>
           <a:prstGeom prst="rect">
             <a:avLst/>
@@ -6650,26 +5986,14 @@
           <a:lstStyle/>
           <a:p>
             <a:pPr>
-              <a:defRPr sz="3600" b="1">
-                <a:solidFill>
-                  <a:srgbClr val="FFFAF2"/>
-                </a:solidFill>
-              </a:defRPr>
-            </a:pPr>
-            <a:r>
-              <a:t>Adopt CC/ISO 36010 as the base text for a</a:t>
-            </a:r>
-          </a:p>
-          <a:p>
-            <a:pPr>
-              <a:defRPr sz="3600" b="1">
-                <a:solidFill>
-                  <a:srgbClr val="FFFAF2"/>
-                </a:solidFill>
-              </a:defRPr>
-            </a:pPr>
-            <a:r>
-              <a:t>Draft International Standard</a:t>
+              <a:defRPr sz="3400" b="1">
+                <a:solidFill>
+                  <a:srgbClr val="0A1628"/>
+                </a:solidFill>
+              </a:defRPr>
+            </a:pPr>
+            <a:r>
+              <a:t>Every markup construct has a home: proven, clause by clause</a:t>
             </a:r>
           </a:p>
         </p:txBody>
@@ -6682,8 +6006,8 @@
         </p:nvSpPr>
         <p:spPr>
           <a:xfrm>
-            <a:off x="1005840" y="3383280"/>
-            <a:ext cx="10058400" cy="548640"/>
+            <a:off x="822960" y="1828800"/>
+            <a:ext cx="3474720" cy="457200"/>
           </a:xfrm>
           <a:prstGeom prst="rect">
             <a:avLst/>
@@ -6697,14 +6021,14 @@
           <a:lstStyle/>
           <a:p>
             <a:pPr>
-              <a:defRPr sz="1600" b="0">
-                <a:solidFill>
-                  <a:srgbClr val="C5DDE4"/>
-                </a:solidFill>
-              </a:defRPr>
-            </a:pPr>
-            <a:r>
-              <a:t>→  Recognize the lightweight document metamodel as the interoperability layer for structured text</a:t>
+              <a:defRPr sz="1700" b="1">
+                <a:solidFill>
+                  <a:srgbClr val="2F6F82"/>
+                </a:solidFill>
+              </a:defRPr>
+            </a:pPr>
+            <a:r>
+              <a:t>AsciiDoc</a:t>
             </a:r>
           </a:p>
         </p:txBody>
@@ -6717,8 +6041,8 @@
         </p:nvSpPr>
         <p:spPr>
           <a:xfrm>
-            <a:off x="1005840" y="4041648"/>
-            <a:ext cx="10058400" cy="548640"/>
+            <a:off x="822960" y="2331720"/>
+            <a:ext cx="3474720" cy="2651760"/>
           </a:xfrm>
           <a:prstGeom prst="rect">
             <a:avLst/>
@@ -6732,14 +6056,67 @@
           <a:lstStyle/>
           <a:p>
             <a:pPr>
-              <a:defRPr sz="1600" b="0">
-                <a:solidFill>
-                  <a:srgbClr val="C5DDE4"/>
-                </a:solidFill>
-              </a:defRPr>
-            </a:pPr>
-            <a:r>
-              <a:t>→  Progress the CalConnect base text through NP → WD → CD → DIS at ISO/TC 154</a:t>
+              <a:defRPr sz="1250" b="0">
+                <a:solidFill>
+                  <a:srgbClr val="243647"/>
+                </a:solidFill>
+                <a:latin typeface="Courier New"/>
+              </a:defRPr>
+            </a:pPr>
+            <a:r>
+              <a:t>header → bibdata + register</a:t>
+            </a:r>
+          </a:p>
+          <a:p>
+            <a:pPr>
+              <a:defRPr sz="1250" b="0">
+                <a:solidFill>
+                  <a:srgbClr val="243647"/>
+                </a:solidFill>
+                <a:latin typeface="Courier New"/>
+              </a:defRPr>
+            </a:pPr>
+            <a:r>
+              <a:t>admonitions → AdmonitionBlock + type</a:t>
+            </a:r>
+          </a:p>
+          <a:p>
+            <a:pPr>
+              <a:defRPr sz="1250" b="0">
+                <a:solidFill>
+                  <a:srgbClr val="243647"/>
+                </a:solidFill>
+                <a:latin typeface="Courier New"/>
+              </a:defRPr>
+            </a:pPr>
+            <a:r>
+              <a:t>continuations → relaxed ListItem</a:t>
+            </a:r>
+          </a:p>
+          <a:p>
+            <a:pPr>
+              <a:defRPr sz="1250" b="0">
+                <a:solidFill>
+                  <a:srgbClr val="243647"/>
+                </a:solidFill>
+                <a:latin typeface="Courier New"/>
+              </a:defRPr>
+            </a:pPr>
+            <a:r>
+              <a:t>passthroughs → FormattedString</a:t>
+            </a:r>
+          </a:p>
+          <a:p>
+            <a:pPr>
+              <a:defRPr sz="1250" b="0">
+                <a:solidFill>
+                  <a:srgbClr val="243647"/>
+                </a:solidFill>
+                <a:latin typeface="Courier New"/>
+              </a:defRPr>
+            </a:pPr>
+            <a:r>
+              <a:t>{attr} → ReferenceToVariable</a:t>
             </a:r>
           </a:p>
         </p:txBody>
@@ -6752,8 +6129,8 @@
         </p:nvSpPr>
         <p:spPr>
           <a:xfrm>
-            <a:off x="1005840" y="4700016"/>
-            <a:ext cx="10058400" cy="548640"/>
+            <a:off x="4480560" y="1828800"/>
+            <a:ext cx="3474720" cy="457200"/>
           </a:xfrm>
           <a:prstGeom prst="rect">
             <a:avLst/>
@@ -6767,14 +6144,14 @@
           <a:lstStyle/>
           <a:p>
             <a:pPr>
-              <a:defRPr sz="1600" b="0">
-                <a:solidFill>
-                  <a:srgbClr val="C5DDE4"/>
-                </a:solidFill>
-              </a:defRPr>
-            </a:pPr>
-            <a:r>
-              <a:t>→  Designate the model repository and its executable conformance suite as the maintenance vehicle</a:t>
+              <a:defRPr sz="1700" b="1">
+                <a:solidFill>
+                  <a:srgbClr val="2F6F82"/>
+                </a:solidFill>
+              </a:defRPr>
+            </a:pPr>
+            <a:r>
+              <a:t>Markdown · GFM · Pandoc</a:t>
             </a:r>
           </a:p>
         </p:txBody>
@@ -6787,8 +6164,8 @@
         </p:nvSpPr>
         <p:spPr>
           <a:xfrm>
-            <a:off x="1005840" y="5358383"/>
-            <a:ext cx="10058400" cy="548640"/>
+            <a:off x="4480560" y="2331720"/>
+            <a:ext cx="3474720" cy="2651760"/>
           </a:xfrm>
           <a:prstGeom prst="rect">
             <a:avLst/>
@@ -6802,14 +6179,67 @@
           <a:lstStyle/>
           <a:p>
             <a:pPr>
-              <a:defRPr sz="1600" b="0">
-                <a:solidFill>
-                  <a:srgbClr val="C5DDE4"/>
-                </a:solidFill>
-              </a:defRPr>
-            </a:pPr>
-            <a:r>
-              <a:t>→  CalConnect (TC VCARD) continues as proposer and editor in liaison with TC 154</a:t>
+              <a:defRPr sz="1250" b="0">
+                <a:solidFill>
+                  <a:srgbClr val="243647"/>
+                </a:solidFill>
+                <a:latin typeface="Courier New"/>
+              </a:defRPr>
+            </a:pPr>
+            <a:r>
+              <a:t>GFM tables → TableBlock</a:t>
+            </a:r>
+          </a:p>
+          <a:p>
+            <a:pPr>
+              <a:defRPr sz="1250" b="0">
+                <a:solidFill>
+                  <a:srgbClr val="243647"/>
+                </a:solidFill>
+                <a:latin typeface="Courier New"/>
+              </a:defRPr>
+            </a:pPr>
+            <a:r>
+              <a:t>{#id .class} → attribute register</a:t>
+            </a:r>
+          </a:p>
+          <a:p>
+            <a:pPr>
+              <a:defRPr sz="1250" b="0">
+                <a:solidFill>
+                  <a:srgbClr val="243647"/>
+                </a:solidFill>
+                <a:latin typeface="Courier New"/>
+              </a:defRPr>
+            </a:pPr>
+            <a:r>
+              <a:t>::: divs → register + any container</a:t>
+            </a:r>
+          </a:p>
+          <a:p>
+            <a:pPr>
+              <a:defRPr sz="1250" b="0">
+                <a:solidFill>
+                  <a:srgbClr val="243647"/>
+                </a:solidFill>
+                <a:latin typeface="Courier New"/>
+              </a:defRPr>
+            </a:pPr>
+            <a:r>
+              <a:t>$math$ → StemElement (LaTeX)</a:t>
+            </a:r>
+          </a:p>
+          <a:p>
+            <a:pPr>
+              <a:defRPr sz="1250" b="0">
+                <a:solidFill>
+                  <a:srgbClr val="243647"/>
+                </a:solidFill>
+                <a:latin typeface="Courier New"/>
+              </a:defRPr>
+            </a:pPr>
+            <a:r>
+              <a:t>raw HTML → FormattedString + format</a:t>
             </a:r>
           </a:p>
         </p:txBody>
@@ -6822,8 +6252,8 @@
         </p:nvSpPr>
         <p:spPr>
           <a:xfrm>
-            <a:off x="822960" y="6126480"/>
-            <a:ext cx="10515600" cy="365760"/>
+            <a:off x="8138160" y="1828800"/>
+            <a:ext cx="3474720" cy="457200"/>
           </a:xfrm>
           <a:prstGeom prst="rect">
             <a:avLst/>
@@ -6837,15 +6267,765 @@
           <a:lstStyle/>
           <a:p>
             <a:pPr>
-              <a:defRPr sz="1200" b="0">
+              <a:defRPr sz="1700" b="1">
+                <a:solidFill>
+                  <a:srgbClr val="2F6F82"/>
+                </a:solidFill>
+              </a:defRPr>
+            </a:pPr>
+            <a:r>
+              <a:t>reStructuredText</a:t>
+            </a:r>
+          </a:p>
+        </p:txBody>
+      </p:sp>
+      <p:sp>
+        <p:nvSpPr>
+          <p:cNvPr id="10" name="TextBox 9"/>
+          <p:cNvSpPr txBox="1"/>
+          <p:nvPr/>
+        </p:nvSpPr>
+        <p:spPr>
+          <a:xfrm>
+            <a:off x="8138160" y="2331720"/>
+            <a:ext cx="3474720" cy="2651760"/>
+          </a:xfrm>
+          <a:prstGeom prst="rect">
+            <a:avLst/>
+          </a:prstGeom>
+          <a:noFill/>
+        </p:spPr>
+        <p:txBody>
+          <a:bodyPr wrap="square">
+            <a:spAutoFit/>
+          </a:bodyPr>
+          <a:lstStyle/>
+          <a:p>
+            <a:pPr>
+              <a:defRPr sz="1250" b="0">
+                <a:solidFill>
+                  <a:srgbClr val="243647"/>
+                </a:solidFill>
+                <a:latin typeface="Courier New"/>
+              </a:defRPr>
+            </a:pPr>
+            <a:r>
+              <a:t>directives → register + relaxed content</a:t>
+            </a:r>
+          </a:p>
+          <a:p>
+            <a:pPr>
+              <a:defRPr sz="1250" b="0">
+                <a:solidFill>
+                  <a:srgbClr val="243647"/>
+                </a:solidFill>
+                <a:latin typeface="Courier New"/>
+              </a:defRPr>
+            </a:pPr>
+            <a:r>
+              <a:t>|substitution| → ReferenceToVariable</a:t>
+            </a:r>
+          </a:p>
+          <a:p>
+            <a:pPr>
+              <a:defRPr sz="1250" b="0">
+                <a:solidFill>
+                  <a:srgbClr val="243647"/>
+                </a:solidFill>
+                <a:latin typeface="Courier New"/>
+              </a:defRPr>
+            </a:pPr>
+            <a:r>
+              <a:t>roles → text specializations</a:t>
+            </a:r>
+          </a:p>
+          <a:p>
+            <a:pPr>
+              <a:defRPr sz="1250" b="0">
+                <a:solidFill>
+                  <a:srgbClr val="243647"/>
+                </a:solidFill>
+                <a:latin typeface="Courier New"/>
+              </a:defRPr>
+            </a:pPr>
+            <a:r>
+              <a:t>field lists → document register</a:t>
+            </a:r>
+          </a:p>
+          <a:p>
+            <a:pPr>
+              <a:defRPr sz="1250" b="0">
+                <a:solidFill>
+                  <a:srgbClr val="243647"/>
+                </a:solidFill>
+                <a:latin typeface="Courier New"/>
+              </a:defRPr>
+            </a:pPr>
+            <a:r>
+              <a:t>danger / error / hint → type extensions</a:t>
+            </a:r>
+          </a:p>
+        </p:txBody>
+      </p:sp>
+      <p:sp>
+        <p:nvSpPr>
+          <p:cNvPr id="11" name="Rectangle 10"/>
+          <p:cNvSpPr/>
+          <p:nvPr/>
+        </p:nvSpPr>
+        <p:spPr>
+          <a:xfrm>
+            <a:off x="822960" y="5029200"/>
+            <a:ext cx="10515600" cy="1051560"/>
+          </a:xfrm>
+          <a:prstGeom prst="rect">
+            <a:avLst/>
+          </a:prstGeom>
+          <a:solidFill>
+            <a:srgbClr val="0A1628"/>
+          </a:solidFill>
+          <a:ln>
+            <a:noFill/>
+          </a:ln>
+        </p:spPr>
+        <p:style>
+          <a:lnRef idx="1">
+            <a:schemeClr val="accent1"/>
+          </a:lnRef>
+          <a:fillRef idx="3">
+            <a:schemeClr val="accent1"/>
+          </a:fillRef>
+          <a:effectRef idx="2">
+            <a:schemeClr val="accent1"/>
+          </a:effectRef>
+          <a:fontRef idx="minor">
+            <a:schemeClr val="lt1"/>
+          </a:fontRef>
+        </p:style>
+        <p:txBody>
+          <a:bodyPr rtlCol="0" anchor="ctr"/>
+          <a:lstStyle/>
+          <a:p>
+            <a:pPr algn="ctr"/>
+          </a:p>
+        </p:txBody>
+      </p:sp>
+      <p:sp>
+        <p:nvSpPr>
+          <p:cNvPr id="12" name="TextBox 11"/>
+          <p:cNvSpPr txBox="1"/>
+          <p:nvPr/>
+        </p:nvSpPr>
+        <p:spPr>
+          <a:xfrm>
+            <a:off x="1097280" y="5157216"/>
+            <a:ext cx="9966960" cy="868680"/>
+          </a:xfrm>
+          <a:prstGeom prst="rect">
+            <a:avLst/>
+          </a:prstGeom>
+          <a:noFill/>
+        </p:spPr>
+        <p:txBody>
+          <a:bodyPr wrap="square">
+            <a:spAutoFit/>
+          </a:bodyPr>
+          <a:lstStyle/>
+          <a:p>
+            <a:pPr>
+              <a:spcAft>
+                <a:spcPts val="400"/>
+              </a:spcAft>
+              <a:defRPr sz="1400" b="1">
+                <a:solidFill>
+                  <a:srgbClr val="FFFAF2"/>
+                </a:solidFill>
+              </a:defRPr>
+            </a:pPr>
+            <a:r>
+              <a:t>Conformance formula — a foreign construct is covered iff it maps to: a construct · a type-specialization · register + relaxed or opaque content.</a:t>
+            </a:r>
+          </a:p>
+          <a:p>
+            <a:pPr>
+              <a:spcAft>
+                <a:spcPts val="400"/>
+              </a:spcAft>
+              <a:defRPr sz="1400" b="1">
+                <a:solidFill>
+                  <a:srgbClr val="FFFAF2"/>
+                </a:solidFill>
+              </a:defRPr>
+            </a:pPr>
+            <a:r>
+              <a:t>Anything unlisted is answerable in one line. That is what “complete superset” means, testably.</a:t>
+            </a:r>
+          </a:p>
+        </p:txBody>
+      </p:sp>
+      <p:sp>
+        <p:nvSpPr>
+          <p:cNvPr id="13" name="TextBox 12"/>
+          <p:cNvSpPr txBox="1"/>
+          <p:nvPr/>
+        </p:nvSpPr>
+        <p:spPr>
+          <a:xfrm>
+            <a:off x="822960" y="6446520"/>
+            <a:ext cx="10515600" cy="320040"/>
+          </a:xfrm>
+          <a:prstGeom prst="rect">
+            <a:avLst/>
+          </a:prstGeom>
+          <a:noFill/>
+        </p:spPr>
+        <p:txBody>
+          <a:bodyPr wrap="square">
+            <a:spAutoFit/>
+          </a:bodyPr>
+          <a:lstStyle/>
+          <a:p>
+            <a:pPr>
+              <a:defRPr sz="1000" b="0">
                 <a:solidFill>
                   <a:srgbClr val="8A9AAB"/>
                 </a:solidFill>
+              </a:defRPr>
+            </a:pPr>
+            <a:r>
+              <a:t>CalConnect → ISO/TC 154 · CC/ISO 36010 · 8</a:t>
+            </a:r>
+          </a:p>
+        </p:txBody>
+      </p:sp>
+    </p:spTree>
+  </p:cSld>
+  <p:clrMapOvr>
+    <a:masterClrMapping/>
+  </p:clrMapOvr>
+</p:sld>
+</file>
+
+<file path=ppt/slides/slide9.xml><?xml version="1.0" encoding="utf-8"?>
+<p:sld xmlns:a="http://schemas.openxmlformats.org/drawingml/2006/main" xmlns:p="http://schemas.openxmlformats.org/presentationml/2006/main" xmlns:r="http://schemas.openxmlformats.org/officeDocument/2006/relationships">
+  <p:cSld>
+    <p:bg>
+      <p:bgPr>
+        <a:solidFill>
+          <a:srgbClr val="FFFAF2"/>
+        </a:solidFill>
+        <a:effectLst/>
+      </p:bgPr>
+    </p:bg>
+    <p:spTree>
+      <p:nvGrpSpPr>
+        <p:cNvPr id="1" name=""/>
+        <p:cNvGrpSpPr/>
+        <p:nvPr/>
+      </p:nvGrpSpPr>
+      <p:grpSpPr/>
+      <p:sp>
+        <p:nvSpPr>
+          <p:cNvPr id="2" name="Rectangle 1"/>
+          <p:cNvSpPr/>
+          <p:nvPr/>
+        </p:nvSpPr>
+        <p:spPr>
+          <a:xfrm>
+            <a:off x="0" y="0"/>
+            <a:ext cx="12191695" cy="109728"/>
+          </a:xfrm>
+          <a:prstGeom prst="rect">
+            <a:avLst/>
+          </a:prstGeom>
+          <a:solidFill>
+            <a:srgbClr val="B85A2A"/>
+          </a:solidFill>
+          <a:ln>
+            <a:noFill/>
+          </a:ln>
+        </p:spPr>
+        <p:style>
+          <a:lnRef idx="1">
+            <a:schemeClr val="accent1"/>
+          </a:lnRef>
+          <a:fillRef idx="3">
+            <a:schemeClr val="accent1"/>
+          </a:fillRef>
+          <a:effectRef idx="2">
+            <a:schemeClr val="accent1"/>
+          </a:effectRef>
+          <a:fontRef idx="minor">
+            <a:schemeClr val="lt1"/>
+          </a:fontRef>
+        </p:style>
+        <p:txBody>
+          <a:bodyPr rtlCol="0" anchor="ctr"/>
+          <a:lstStyle/>
+          <a:p>
+            <a:pPr algn="ctr"/>
+          </a:p>
+        </p:txBody>
+      </p:sp>
+      <p:sp>
+        <p:nvSpPr>
+          <p:cNvPr id="3" name="TextBox 2"/>
+          <p:cNvSpPr txBox="1"/>
+          <p:nvPr/>
+        </p:nvSpPr>
+        <p:spPr>
+          <a:xfrm>
+            <a:off x="822960" y="457200"/>
+            <a:ext cx="10515600" cy="365760"/>
+          </a:xfrm>
+          <a:prstGeom prst="rect">
+            <a:avLst/>
+          </a:prstGeom>
+          <a:noFill/>
+        </p:spPr>
+        <p:txBody>
+          <a:bodyPr wrap="square">
+            <a:spAutoFit/>
+          </a:bodyPr>
+          <a:lstStyle/>
+          <a:p>
+            <a:pPr>
+              <a:defRPr sz="1400" b="0">
+                <a:solidFill>
+                  <a:srgbClr val="2F6F82"/>
+                </a:solidFill>
                 <a:latin typeface="Courier New"/>
               </a:defRPr>
             </a:pPr>
             <a:r>
-              <a:t>metanorma.github.io/basicdoc-models  ·  github.com/metanorma/basicdoc-models  ·  CC/ISO 36010</a:t>
+              <a:t>SPECIALIZE AND EXTEND — ANNEXES B AND C</a:t>
+            </a:r>
+          </a:p>
+        </p:txBody>
+      </p:sp>
+      <p:sp>
+        <p:nvSpPr>
+          <p:cNvPr id="4" name="TextBox 3"/>
+          <p:cNvSpPr txBox="1"/>
+          <p:nvPr/>
+        </p:nvSpPr>
+        <p:spPr>
+          <a:xfrm>
+            <a:off x="822960" y="841248"/>
+            <a:ext cx="10515600" cy="960120"/>
+          </a:xfrm>
+          <a:prstGeom prst="rect">
+            <a:avLst/>
+          </a:prstGeom>
+          <a:noFill/>
+        </p:spPr>
+        <p:txBody>
+          <a:bodyPr wrap="square">
+            <a:spAutoFit/>
+          </a:bodyPr>
+          <a:lstStyle/>
+          <a:p>
+            <a:pPr>
+              <a:defRPr sz="3400" b="1">
+                <a:solidFill>
+                  <a:srgbClr val="0A1628"/>
+                </a:solidFill>
+              </a:defRPr>
+            </a:pPr>
+            <a:r>
+              <a:t>Dialects arrive without ever forking the model</a:t>
+            </a:r>
+          </a:p>
+        </p:txBody>
+      </p:sp>
+      <p:sp>
+        <p:nvSpPr>
+          <p:cNvPr id="5" name="TextBox 4"/>
+          <p:cNvSpPr txBox="1"/>
+          <p:nvPr/>
+        </p:nvSpPr>
+        <p:spPr>
+          <a:xfrm>
+            <a:off x="822960" y="1783080"/>
+            <a:ext cx="5029200" cy="365760"/>
+          </a:xfrm>
+          <a:prstGeom prst="rect">
+            <a:avLst/>
+          </a:prstGeom>
+          <a:noFill/>
+        </p:spPr>
+        <p:txBody>
+          <a:bodyPr wrap="square">
+            <a:spAutoFit/>
+          </a:bodyPr>
+          <a:lstStyle/>
+          <a:p>
+            <a:pPr>
+              <a:defRPr sz="1600" b="1">
+                <a:solidFill>
+                  <a:srgbClr val="2F6F82"/>
+                </a:solidFill>
+                <a:latin typeface="Courier New"/>
+              </a:defRPr>
+            </a:pPr>
+            <a:r>
+              <a:t>SPECIALIZE</a:t>
+            </a:r>
+          </a:p>
+        </p:txBody>
+      </p:sp>
+      <p:sp>
+        <p:nvSpPr>
+          <p:cNvPr id="6" name="TextBox 5"/>
+          <p:cNvSpPr txBox="1"/>
+          <p:nvPr/>
+        </p:nvSpPr>
+        <p:spPr>
+          <a:xfrm>
+            <a:off x="822960" y="2212848"/>
+            <a:ext cx="5029200" cy="3108960"/>
+          </a:xfrm>
+          <a:prstGeom prst="rect">
+            <a:avLst/>
+          </a:prstGeom>
+          <a:noFill/>
+        </p:spPr>
+        <p:txBody>
+          <a:bodyPr wrap="square">
+            <a:spAutoFit/>
+          </a:bodyPr>
+          <a:lstStyle/>
+          <a:p>
+            <a:pPr>
+              <a:defRPr sz="1350" b="0">
+                <a:solidFill>
+                  <a:srgbClr val="243647"/>
+                </a:solidFill>
+              </a:defRPr>
+            </a:pPr>
+            <a:r>
+              <a:t>· Type values, not parallel classes —</a:t>
+            </a:r>
+          </a:p>
+          <a:p>
+            <a:pPr>
+              <a:defRPr sz="1350" b="0">
+                <a:solidFill>
+                  <a:srgbClr val="243647"/>
+                </a:solidFill>
+              </a:defRPr>
+            </a:pPr>
+            <a:r>
+              <a:t>  admonition kinds, list numeration,</a:t>
+            </a:r>
+          </a:p>
+          <a:p>
+            <a:pPr>
+              <a:defRPr sz="1350" b="0">
+                <a:solidFill>
+                  <a:srgbClr val="243647"/>
+                </a:solidFill>
+              </a:defRPr>
+            </a:pPr>
+            <a:r>
+              <a:t>  stem languages, document classes</a:t>
+            </a:r>
+          </a:p>
+          <a:p>
+            <a:pPr>
+              <a:defRPr sz="1350" b="0">
+                <a:solidFill>
+                  <a:srgbClr val="243647"/>
+                </a:solidFill>
+              </a:defRPr>
+            </a:pPr>
+            <a:r>
+              <a:t>· Attribute overrides: add, remove,</a:t>
+            </a:r>
+          </a:p>
+          <a:p>
+            <a:pPr>
+              <a:defRPr sz="1350" b="0">
+                <a:solidFill>
+                  <a:srgbClr val="243647"/>
+                </a:solidFill>
+              </a:defRPr>
+            </a:pPr>
+            <a:r>
+              <a:t>  retighten (e.g. no hanging paragraphs)</a:t>
+            </a:r>
+          </a:p>
+          <a:p>
+            <a:pPr>
+              <a:defRPr sz="1350" b="0">
+                <a:solidFill>
+                  <a:srgbClr val="243647"/>
+                </a:solidFill>
+              </a:defRPr>
+            </a:pPr>
+            <a:r>
+              <a:t>· Subclassing under the construct roots</a:t>
+            </a:r>
+          </a:p>
+          <a:p>
+            <a:pPr>
+              <a:defRPr sz="1350" b="0">
+                <a:solidFill>
+                  <a:srgbClr val="243647"/>
+                </a:solidFill>
+              </a:defRPr>
+            </a:pPr>
+            <a:r>
+              <a:t>· Constraint specialization:</a:t>
+            </a:r>
+          </a:p>
+          <a:p>
+            <a:pPr>
+              <a:defRPr sz="1350" b="0">
+                <a:solidFill>
+                  <a:srgbClr val="243647"/>
+                </a:solidFill>
+              </a:defRPr>
+            </a:pPr>
+            <a:r>
+              <a:t>  PureTextElement recursion guarantees</a:t>
+            </a:r>
+          </a:p>
+        </p:txBody>
+      </p:sp>
+      <p:sp>
+        <p:nvSpPr>
+          <p:cNvPr id="7" name="TextBox 6"/>
+          <p:cNvSpPr txBox="1"/>
+          <p:nvPr/>
+        </p:nvSpPr>
+        <p:spPr>
+          <a:xfrm>
+            <a:off x="6400800" y="1783080"/>
+            <a:ext cx="4937760" cy="365760"/>
+          </a:xfrm>
+          <a:prstGeom prst="rect">
+            <a:avLst/>
+          </a:prstGeom>
+          <a:noFill/>
+        </p:spPr>
+        <p:txBody>
+          <a:bodyPr wrap="square">
+            <a:spAutoFit/>
+          </a:bodyPr>
+          <a:lstStyle/>
+          <a:p>
+            <a:pPr>
+              <a:defRPr sz="1600" b="1">
+                <a:solidFill>
+                  <a:srgbClr val="B85A2A"/>
+                </a:solidFill>
+                <a:latin typeface="Courier New"/>
+              </a:defRPr>
+            </a:pPr>
+            <a:r>
+              <a:t>EXTEND</a:t>
+            </a:r>
+          </a:p>
+        </p:txBody>
+      </p:sp>
+      <p:sp>
+        <p:nvSpPr>
+          <p:cNvPr id="8" name="TextBox 7"/>
+          <p:cNvSpPr txBox="1"/>
+          <p:nvPr/>
+        </p:nvSpPr>
+        <p:spPr>
+          <a:xfrm>
+            <a:off x="6400800" y="2212848"/>
+            <a:ext cx="4937760" cy="3200400"/>
+          </a:xfrm>
+          <a:prstGeom prst="rect">
+            <a:avLst/>
+          </a:prstGeom>
+          <a:noFill/>
+        </p:spPr>
+        <p:txBody>
+          <a:bodyPr wrap="square">
+            <a:spAutoFit/>
+          </a:bodyPr>
+          <a:lstStyle/>
+          <a:p>
+            <a:pPr>
+              <a:defRPr sz="1350" b="0">
+                <a:solidFill>
+                  <a:srgbClr val="243647"/>
+                </a:solidFill>
+              </a:defRPr>
+            </a:pPr>
+            <a:r>
+              <a:t>· Attribute register: open key-value</a:t>
+            </a:r>
+          </a:p>
+          <a:p>
+            <a:pPr>
+              <a:defRPr sz="1350" b="0">
+                <a:solidFill>
+                  <a:srgbClr val="243647"/>
+                </a:solidFill>
+              </a:defRPr>
+            </a:pPr>
+            <a:r>
+              <a:t>  entries on any construct — dialect</a:t>
+            </a:r>
+          </a:p>
+          <a:p>
+            <a:pPr>
+              <a:defRPr sz="1350" b="0">
+                <a:solidFill>
+                  <a:srgbClr val="243647"/>
+                </a:solidFill>
+              </a:defRPr>
+            </a:pPr>
+            <a:r>
+              <a:t>  keys (checkbox, option), no model change</a:t>
+            </a:r>
+          </a:p>
+          <a:p>
+            <a:pPr>
+              <a:defRPr sz="1350" b="0">
+                <a:solidFill>
+                  <a:srgbClr val="243647"/>
+                </a:solidFill>
+              </a:defRPr>
+            </a:pPr>
+            <a:r>
+              <a:t>· Raw stays lossless: FormattedString,</a:t>
+            </a:r>
+          </a:p>
+          <a:p>
+            <a:pPr>
+              <a:defRPr sz="1350" b="0">
+                <a:solidFill>
+                  <a:srgbClr val="243647"/>
+                </a:solidFill>
+              </a:defRPr>
+            </a:pPr>
+            <a:r>
+              <a:t>  format-qualified blocks</a:t>
+            </a:r>
+          </a:p>
+          <a:p>
+            <a:pPr>
+              <a:defRPr sz="1350" b="0">
+                <a:solidFill>
+                  <a:srgbClr val="243647"/>
+                </a:solidFill>
+              </a:defRPr>
+            </a:pPr>
+            <a:r>
+              <a:t>· Unknown directives (all of Sphinx)</a:t>
+            </a:r>
+          </a:p>
+          <a:p>
+            <a:pPr>
+              <a:defRPr sz="1350" b="0">
+                <a:solidFill>
+                  <a:srgbClr val="243647"/>
+                </a:solidFill>
+              </a:defRPr>
+            </a:pPr>
+            <a:r>
+              <a:t>  decompose into register + relaxed content</a:t>
+            </a:r>
+          </a:p>
+          <a:p>
+            <a:pPr>
+              <a:defRPr sz="1350" b="0">
+                <a:solidFill>
+                  <a:srgbClr val="243647"/>
+                </a:solidFill>
+              </a:defRPr>
+            </a:pPr>
+            <a:r>
+              <a:t>· A document is a block: whole documents</a:t>
+            </a:r>
+          </a:p>
+          <a:p>
+            <a:pPr>
+              <a:defRPr sz="1350" b="0">
+                <a:solidFill>
+                  <a:srgbClr val="243647"/>
+                </a:solidFill>
+              </a:defRPr>
+            </a:pPr>
+            <a:r>
+              <a:t>  compose as child content</a:t>
+            </a:r>
+          </a:p>
+        </p:txBody>
+      </p:sp>
+      <p:sp>
+        <p:nvSpPr>
+          <p:cNvPr id="9" name="TextBox 8"/>
+          <p:cNvSpPr txBox="1"/>
+          <p:nvPr/>
+        </p:nvSpPr>
+        <p:spPr>
+          <a:xfrm>
+            <a:off x="822960" y="5715000"/>
+            <a:ext cx="10515600" cy="685800"/>
+          </a:xfrm>
+          <a:prstGeom prst="rect">
+            <a:avLst/>
+          </a:prstGeom>
+          <a:noFill/>
+        </p:spPr>
+        <p:txBody>
+          <a:bodyPr wrap="square">
+            <a:spAutoFit/>
+          </a:bodyPr>
+          <a:lstStyle/>
+          <a:p>
+            <a:pPr>
+              <a:defRPr sz="1600" b="1">
+                <a:solidFill>
+                  <a:srgbClr val="B85A2A"/>
+                </a:solidFill>
+              </a:defRPr>
+            </a:pPr>
+            <a:r>
+              <a:t>Open-closed by construction: the basis is defined once and never modified — only specialized upon.</a:t>
+            </a:r>
+          </a:p>
+        </p:txBody>
+      </p:sp>
+      <p:sp>
+        <p:nvSpPr>
+          <p:cNvPr id="10" name="TextBox 9"/>
+          <p:cNvSpPr txBox="1"/>
+          <p:nvPr/>
+        </p:nvSpPr>
+        <p:spPr>
+          <a:xfrm>
+            <a:off x="822960" y="6446520"/>
+            <a:ext cx="10515600" cy="320040"/>
+          </a:xfrm>
+          <a:prstGeom prst="rect">
+            <a:avLst/>
+          </a:prstGeom>
+          <a:noFill/>
+        </p:spPr>
+        <p:txBody>
+          <a:bodyPr wrap="square">
+            <a:spAutoFit/>
+          </a:bodyPr>
+          <a:lstStyle/>
+          <a:p>
+            <a:pPr>
+              <a:defRPr sz="1000" b="0">
+                <a:solidFill>
+                  <a:srgbClr val="8A9AAB"/>
+                </a:solidFill>
+              </a:defRPr>
+            </a:pPr>
+            <a:r>
+              <a:t>CalConnect → ISO/TC 154 · CC/ISO 36010 · 9</a:t>
             </a:r>
           </a:p>
         </p:txBody>
